--- a/exports/pptx/lessons/senior-module-05-dot-addition/day-01-hook.pptx
+++ b/exports/pptx/lessons/senior-module-05-dot-addition/day-01-hook.pptx
@@ -15,9 +15,14 @@
     <p:sldId id="263" r:id="rId9"/>
     <p:sldId id="264" r:id="rId10"/>
     <p:sldId id="265" r:id="rId11"/>
+    <p:sldId id="266" r:id="rId12"/>
+    <p:sldId id="267" r:id="rId13"/>
+    <p:sldId id="268" r:id="rId14"/>
+    <p:sldId id="269" r:id="rId15"/>
+    <p:sldId id="270" r:id="rId16"/>
   </p:sldIdLst>
   <p:notesMasterIdLst>
-    <p:notesMasterId r:id="rId12"/>
+    <p:notesMasterId r:id="rId17"/>
   </p:notesMasterIdLst>
   <p:sldSz cx="9144000" cy="5143500"/>
   <p:notesSz cx="5143500" cy="9144000"/>
@@ -623,6 +628,446 @@
             <a:fld id="{F7021451-1387-4CA6-816F-3879F97B5CBC}" type="slidenum">
               <a:rPr lang="en-US"/>
               <a:t>10</a:t>
+            </a:fld>
+            <a:endParaRPr lang="en-US"/>
+          </a:p>
+        </p:txBody>
+      </p:sp>
+    </p:spTree>
+    <p:extLst>
+      <p:ext uri="{BB962C8B-B14F-4D97-AF65-F5344CB8AC3E}">
+        <p14:creationId xmlns:p14="http://schemas.microsoft.com/office/powerpoint/2010/main" val="1024086991"/>
+      </p:ext>
+    </p:extLst>
+  </p:cSld>
+  <p:clrMapOvr>
+    <a:masterClrMapping/>
+  </p:clrMapOvr>
+</p:notes>
+</file>
+
+<file path=ppt/notesSlides/notesSlide11.xml><?xml version="1.0" encoding="utf-8"?>
+<p:notes xmlns:a="http://schemas.openxmlformats.org/drawingml/2006/main" xmlns:r="http://schemas.openxmlformats.org/officeDocument/2006/relationships" xmlns:p="http://schemas.openxmlformats.org/presentationml/2006/main">
+  <p:cSld>
+    <p:spTree>
+      <p:nvGrpSpPr>
+        <p:cNvPr id="1" name=""/>
+        <p:cNvGrpSpPr/>
+        <p:nvPr/>
+      </p:nvGrpSpPr>
+      <p:grpSpPr>
+        <a:xfrm>
+          <a:off x="0" y="0"/>
+          <a:ext cx="0" cy="0"/>
+          <a:chOff x="0" y="0"/>
+          <a:chExt cx="0" cy="0"/>
+        </a:xfrm>
+      </p:grpSpPr>
+      <p:sp>
+        <p:nvSpPr>
+          <p:cNvPr id="2" name="Slide Image Placeholder 1"/>
+          <p:cNvSpPr>
+            <a:spLocks noGrp="1" noRot="1" noChangeAspect="1"/>
+          </p:cNvSpPr>
+          <p:nvPr>
+            <p:ph type="sldImg"/>
+          </p:nvPr>
+        </p:nvSpPr>
+        <p:spPr/>
+      </p:sp>
+      <p:sp>
+        <p:nvSpPr>
+          <p:cNvPr id="3" name="Notes Placeholder 2"/>
+          <p:cNvSpPr>
+            <a:spLocks noGrp="1"/>
+          </p:cNvSpPr>
+          <p:nvPr>
+            <p:ph type="body" idx="1"/>
+          </p:nvPr>
+        </p:nvSpPr>
+        <p:spPr/>
+        <p:txBody>
+          <a:bodyPr/>
+          <a:lstStyle/>
+          <a:p>
+            <a:r>
+              <a:rPr lang="en-US" dirty="0"/>
+              <a:t/>
+            </a:r>
+            <a:endParaRPr lang="en-US" dirty="0"/>
+          </a:p>
+        </p:txBody>
+      </p:sp>
+      <p:sp>
+        <p:nvSpPr>
+          <p:cNvPr id="4" name="Slide Number Placeholder 3"/>
+          <p:cNvSpPr>
+            <a:spLocks noGrp="1"/>
+          </p:cNvSpPr>
+          <p:nvPr>
+            <p:ph type="sldNum" sz="quarter" idx="10"/>
+          </p:nvPr>
+        </p:nvSpPr>
+        <p:spPr/>
+        <p:txBody>
+          <a:bodyPr/>
+          <a:lstStyle/>
+          <a:p>
+            <a:fld id="{F7021451-1387-4CA6-816F-3879F97B5CBC}" type="slidenum">
+              <a:rPr lang="en-US"/>
+              <a:t>11</a:t>
+            </a:fld>
+            <a:endParaRPr lang="en-US"/>
+          </a:p>
+        </p:txBody>
+      </p:sp>
+    </p:spTree>
+    <p:extLst>
+      <p:ext uri="{BB962C8B-B14F-4D97-AF65-F5344CB8AC3E}">
+        <p14:creationId xmlns:p14="http://schemas.microsoft.com/office/powerpoint/2010/main" val="1024086991"/>
+      </p:ext>
+    </p:extLst>
+  </p:cSld>
+  <p:clrMapOvr>
+    <a:masterClrMapping/>
+  </p:clrMapOvr>
+</p:notes>
+</file>
+
+<file path=ppt/notesSlides/notesSlide12.xml><?xml version="1.0" encoding="utf-8"?>
+<p:notes xmlns:a="http://schemas.openxmlformats.org/drawingml/2006/main" xmlns:r="http://schemas.openxmlformats.org/officeDocument/2006/relationships" xmlns:p="http://schemas.openxmlformats.org/presentationml/2006/main">
+  <p:cSld>
+    <p:spTree>
+      <p:nvGrpSpPr>
+        <p:cNvPr id="1" name=""/>
+        <p:cNvGrpSpPr/>
+        <p:nvPr/>
+      </p:nvGrpSpPr>
+      <p:grpSpPr>
+        <a:xfrm>
+          <a:off x="0" y="0"/>
+          <a:ext cx="0" cy="0"/>
+          <a:chOff x="0" y="0"/>
+          <a:chExt cx="0" cy="0"/>
+        </a:xfrm>
+      </p:grpSpPr>
+      <p:sp>
+        <p:nvSpPr>
+          <p:cNvPr id="2" name="Slide Image Placeholder 1"/>
+          <p:cNvSpPr>
+            <a:spLocks noGrp="1" noRot="1" noChangeAspect="1"/>
+          </p:cNvSpPr>
+          <p:nvPr>
+            <p:ph type="sldImg"/>
+          </p:nvPr>
+        </p:nvSpPr>
+        <p:spPr/>
+      </p:sp>
+      <p:sp>
+        <p:nvSpPr>
+          <p:cNvPr id="3" name="Notes Placeholder 2"/>
+          <p:cNvSpPr>
+            <a:spLocks noGrp="1"/>
+          </p:cNvSpPr>
+          <p:nvPr>
+            <p:ph type="body" idx="1"/>
+          </p:nvPr>
+        </p:nvSpPr>
+        <p:spPr/>
+        <p:txBody>
+          <a:bodyPr/>
+          <a:lstStyle/>
+          <a:p>
+            <a:r>
+              <a:rPr lang="en-US" dirty="0"/>
+              <a:t/>
+            </a:r>
+            <a:endParaRPr lang="en-US" dirty="0"/>
+          </a:p>
+        </p:txBody>
+      </p:sp>
+      <p:sp>
+        <p:nvSpPr>
+          <p:cNvPr id="4" name="Slide Number Placeholder 3"/>
+          <p:cNvSpPr>
+            <a:spLocks noGrp="1"/>
+          </p:cNvSpPr>
+          <p:nvPr>
+            <p:ph type="sldNum" sz="quarter" idx="10"/>
+          </p:nvPr>
+        </p:nvSpPr>
+        <p:spPr/>
+        <p:txBody>
+          <a:bodyPr/>
+          <a:lstStyle/>
+          <a:p>
+            <a:fld id="{F7021451-1387-4CA6-816F-3879F97B5CBC}" type="slidenum">
+              <a:rPr lang="en-US"/>
+              <a:t>12</a:t>
+            </a:fld>
+            <a:endParaRPr lang="en-US"/>
+          </a:p>
+        </p:txBody>
+      </p:sp>
+    </p:spTree>
+    <p:extLst>
+      <p:ext uri="{BB962C8B-B14F-4D97-AF65-F5344CB8AC3E}">
+        <p14:creationId xmlns:p14="http://schemas.microsoft.com/office/powerpoint/2010/main" val="1024086991"/>
+      </p:ext>
+    </p:extLst>
+  </p:cSld>
+  <p:clrMapOvr>
+    <a:masterClrMapping/>
+  </p:clrMapOvr>
+</p:notes>
+</file>
+
+<file path=ppt/notesSlides/notesSlide13.xml><?xml version="1.0" encoding="utf-8"?>
+<p:notes xmlns:a="http://schemas.openxmlformats.org/drawingml/2006/main" xmlns:r="http://schemas.openxmlformats.org/officeDocument/2006/relationships" xmlns:p="http://schemas.openxmlformats.org/presentationml/2006/main">
+  <p:cSld>
+    <p:spTree>
+      <p:nvGrpSpPr>
+        <p:cNvPr id="1" name=""/>
+        <p:cNvGrpSpPr/>
+        <p:nvPr/>
+      </p:nvGrpSpPr>
+      <p:grpSpPr>
+        <a:xfrm>
+          <a:off x="0" y="0"/>
+          <a:ext cx="0" cy="0"/>
+          <a:chOff x="0" y="0"/>
+          <a:chExt cx="0" cy="0"/>
+        </a:xfrm>
+      </p:grpSpPr>
+      <p:sp>
+        <p:nvSpPr>
+          <p:cNvPr id="2" name="Slide Image Placeholder 1"/>
+          <p:cNvSpPr>
+            <a:spLocks noGrp="1" noRot="1" noChangeAspect="1"/>
+          </p:cNvSpPr>
+          <p:nvPr>
+            <p:ph type="sldImg"/>
+          </p:nvPr>
+        </p:nvSpPr>
+        <p:spPr/>
+      </p:sp>
+      <p:sp>
+        <p:nvSpPr>
+          <p:cNvPr id="3" name="Notes Placeholder 2"/>
+          <p:cNvSpPr>
+            <a:spLocks noGrp="1"/>
+          </p:cNvSpPr>
+          <p:nvPr>
+            <p:ph type="body" idx="1"/>
+          </p:nvPr>
+        </p:nvSpPr>
+        <p:spPr/>
+        <p:txBody>
+          <a:bodyPr/>
+          <a:lstStyle/>
+          <a:p>
+            <a:r>
+              <a:rPr lang="en-US" dirty="0"/>
+              <a:t/>
+            </a:r>
+            <a:endParaRPr lang="en-US" dirty="0"/>
+          </a:p>
+        </p:txBody>
+      </p:sp>
+      <p:sp>
+        <p:nvSpPr>
+          <p:cNvPr id="4" name="Slide Number Placeholder 3"/>
+          <p:cNvSpPr>
+            <a:spLocks noGrp="1"/>
+          </p:cNvSpPr>
+          <p:nvPr>
+            <p:ph type="sldNum" sz="quarter" idx="10"/>
+          </p:nvPr>
+        </p:nvSpPr>
+        <p:spPr/>
+        <p:txBody>
+          <a:bodyPr/>
+          <a:lstStyle/>
+          <a:p>
+            <a:fld id="{F7021451-1387-4CA6-816F-3879F97B5CBC}" type="slidenum">
+              <a:rPr lang="en-US"/>
+              <a:t>13</a:t>
+            </a:fld>
+            <a:endParaRPr lang="en-US"/>
+          </a:p>
+        </p:txBody>
+      </p:sp>
+    </p:spTree>
+    <p:extLst>
+      <p:ext uri="{BB962C8B-B14F-4D97-AF65-F5344CB8AC3E}">
+        <p14:creationId xmlns:p14="http://schemas.microsoft.com/office/powerpoint/2010/main" val="1024086991"/>
+      </p:ext>
+    </p:extLst>
+  </p:cSld>
+  <p:clrMapOvr>
+    <a:masterClrMapping/>
+  </p:clrMapOvr>
+</p:notes>
+</file>
+
+<file path=ppt/notesSlides/notesSlide14.xml><?xml version="1.0" encoding="utf-8"?>
+<p:notes xmlns:a="http://schemas.openxmlformats.org/drawingml/2006/main" xmlns:r="http://schemas.openxmlformats.org/officeDocument/2006/relationships" xmlns:p="http://schemas.openxmlformats.org/presentationml/2006/main">
+  <p:cSld>
+    <p:spTree>
+      <p:nvGrpSpPr>
+        <p:cNvPr id="1" name=""/>
+        <p:cNvGrpSpPr/>
+        <p:nvPr/>
+      </p:nvGrpSpPr>
+      <p:grpSpPr>
+        <a:xfrm>
+          <a:off x="0" y="0"/>
+          <a:ext cx="0" cy="0"/>
+          <a:chOff x="0" y="0"/>
+          <a:chExt cx="0" cy="0"/>
+        </a:xfrm>
+      </p:grpSpPr>
+      <p:sp>
+        <p:nvSpPr>
+          <p:cNvPr id="2" name="Slide Image Placeholder 1"/>
+          <p:cNvSpPr>
+            <a:spLocks noGrp="1" noRot="1" noChangeAspect="1"/>
+          </p:cNvSpPr>
+          <p:nvPr>
+            <p:ph type="sldImg"/>
+          </p:nvPr>
+        </p:nvSpPr>
+        <p:spPr/>
+      </p:sp>
+      <p:sp>
+        <p:nvSpPr>
+          <p:cNvPr id="3" name="Notes Placeholder 2"/>
+          <p:cNvSpPr>
+            <a:spLocks noGrp="1"/>
+          </p:cNvSpPr>
+          <p:nvPr>
+            <p:ph type="body" idx="1"/>
+          </p:nvPr>
+        </p:nvSpPr>
+        <p:spPr/>
+        <p:txBody>
+          <a:bodyPr/>
+          <a:lstStyle/>
+          <a:p>
+            <a:r>
+              <a:rPr lang="en-US" dirty="0"/>
+              <a:t/>
+            </a:r>
+            <a:endParaRPr lang="en-US" dirty="0"/>
+          </a:p>
+        </p:txBody>
+      </p:sp>
+      <p:sp>
+        <p:nvSpPr>
+          <p:cNvPr id="4" name="Slide Number Placeholder 3"/>
+          <p:cNvSpPr>
+            <a:spLocks noGrp="1"/>
+          </p:cNvSpPr>
+          <p:nvPr>
+            <p:ph type="sldNum" sz="quarter" idx="10"/>
+          </p:nvPr>
+        </p:nvSpPr>
+        <p:spPr/>
+        <p:txBody>
+          <a:bodyPr/>
+          <a:lstStyle/>
+          <a:p>
+            <a:fld id="{F7021451-1387-4CA6-816F-3879F97B5CBC}" type="slidenum">
+              <a:rPr lang="en-US"/>
+              <a:t>14</a:t>
+            </a:fld>
+            <a:endParaRPr lang="en-US"/>
+          </a:p>
+        </p:txBody>
+      </p:sp>
+    </p:spTree>
+    <p:extLst>
+      <p:ext uri="{BB962C8B-B14F-4D97-AF65-F5344CB8AC3E}">
+        <p14:creationId xmlns:p14="http://schemas.microsoft.com/office/powerpoint/2010/main" val="1024086991"/>
+      </p:ext>
+    </p:extLst>
+  </p:cSld>
+  <p:clrMapOvr>
+    <a:masterClrMapping/>
+  </p:clrMapOvr>
+</p:notes>
+</file>
+
+<file path=ppt/notesSlides/notesSlide15.xml><?xml version="1.0" encoding="utf-8"?>
+<p:notes xmlns:a="http://schemas.openxmlformats.org/drawingml/2006/main" xmlns:r="http://schemas.openxmlformats.org/officeDocument/2006/relationships" xmlns:p="http://schemas.openxmlformats.org/presentationml/2006/main">
+  <p:cSld>
+    <p:spTree>
+      <p:nvGrpSpPr>
+        <p:cNvPr id="1" name=""/>
+        <p:cNvGrpSpPr/>
+        <p:nvPr/>
+      </p:nvGrpSpPr>
+      <p:grpSpPr>
+        <a:xfrm>
+          <a:off x="0" y="0"/>
+          <a:ext cx="0" cy="0"/>
+          <a:chOff x="0" y="0"/>
+          <a:chExt cx="0" cy="0"/>
+        </a:xfrm>
+      </p:grpSpPr>
+      <p:sp>
+        <p:nvSpPr>
+          <p:cNvPr id="2" name="Slide Image Placeholder 1"/>
+          <p:cNvSpPr>
+            <a:spLocks noGrp="1" noRot="1" noChangeAspect="1"/>
+          </p:cNvSpPr>
+          <p:nvPr>
+            <p:ph type="sldImg"/>
+          </p:nvPr>
+        </p:nvSpPr>
+        <p:spPr/>
+      </p:sp>
+      <p:sp>
+        <p:nvSpPr>
+          <p:cNvPr id="3" name="Notes Placeholder 2"/>
+          <p:cNvSpPr>
+            <a:spLocks noGrp="1"/>
+          </p:cNvSpPr>
+          <p:nvPr>
+            <p:ph type="body" idx="1"/>
+          </p:nvPr>
+        </p:nvSpPr>
+        <p:spPr/>
+        <p:txBody>
+          <a:bodyPr/>
+          <a:lstStyle/>
+          <a:p>
+            <a:r>
+              <a:rPr lang="en-US" dirty="0"/>
+              <a:t/>
+            </a:r>
+            <a:endParaRPr lang="en-US" dirty="0"/>
+          </a:p>
+        </p:txBody>
+      </p:sp>
+      <p:sp>
+        <p:nvSpPr>
+          <p:cNvPr id="4" name="Slide Number Placeholder 3"/>
+          <p:cNvSpPr>
+            <a:spLocks noGrp="1"/>
+          </p:cNvSpPr>
+          <p:nvPr>
+            <p:ph type="sldNum" sz="quarter" idx="10"/>
+          </p:nvPr>
+        </p:nvSpPr>
+        <p:spPr/>
+        <p:txBody>
+          <a:bodyPr/>
+          <a:lstStyle/>
+          <a:p>
+            <a:fld id="{F7021451-1387-4CA6-816F-3879F97B5CBC}" type="slidenum">
+              <a:rPr lang="en-US"/>
+              <a:t>15</a:t>
             </a:fld>
             <a:endParaRPr lang="en-US"/>
           </a:p>
@@ -1876,102 +2321,6 @@
         </p:nvSpPr>
         <p:spPr>
           <a:xfrm>
-            <a:off x="406301" y="1223963"/>
-            <a:ext cx="8498026" cy="274290"/>
-          </a:xfrm>
-          <a:prstGeom prst="rect">
-            <a:avLst/>
-          </a:prstGeom>
-          <a:noFill/>
-          <a:ln/>
-        </p:spPr>
-        <p:txBody>
-          <a:bodyPr wrap="square" lIns="0" tIns="0" rIns="0" bIns="0" rtlCol="0" anchor="t"/>
-          <a:lstStyle/>
-          <a:p>
-            <a:pPr algn="l" indent="0" marL="0">
-              <a:lnSpc>
-                <a:spcPts val="2160"/>
-              </a:lnSpc>
-              <a:spcBef>
-                <a:spcPts val="600"/>
-              </a:spcBef>
-              <a:spcAft>
-                <a:spcPts val="800"/>
-              </a:spcAft>
-              <a:buNone/>
-            </a:pPr>
-            <a:r>
-              <a:rPr lang="en-US" sz="1800" b="1" dirty="0">
-                <a:solidFill>
-                  <a:srgbClr val="997929"/>
-                </a:solidFill>
-                <a:latin typeface="Times New Roman" pitchFamily="34" charset="0"/>
-                <a:ea typeface="Times New Roman" pitchFamily="34" charset="-122"/>
-                <a:cs typeface="Times New Roman" pitchFamily="34" charset="-120"/>
-              </a:rPr>
-              <a:t>Learning objective</a:t>
-            </a:r>
-            <a:endParaRPr lang="en-US" sz="1800" dirty="0"/>
-          </a:p>
-        </p:txBody>
-      </p:sp>
-      <p:sp>
-        <p:nvSpPr>
-          <p:cNvPr id="6" name="Text 4"/>
-          <p:cNvSpPr/>
-          <p:nvPr/>
-        </p:nvSpPr>
-        <p:spPr>
-          <a:xfrm>
-            <a:off x="406301" y="1637854"/>
-            <a:ext cx="8498026" cy="426541"/>
-          </a:xfrm>
-          <a:prstGeom prst="rect">
-            <a:avLst/>
-          </a:prstGeom>
-          <a:noFill/>
-          <a:ln/>
-        </p:spPr>
-        <p:txBody>
-          <a:bodyPr wrap="square" lIns="0" tIns="0" rIns="0" bIns="0" rtlCol="0" anchor="t"/>
-          <a:lstStyle/>
-          <a:p>
-            <a:pPr algn="l" indent="0" marL="0">
-              <a:lnSpc>
-                <a:spcPts val="1680"/>
-              </a:lnSpc>
-              <a:spcBef>
-                <a:spcPts val="300"/>
-              </a:spcBef>
-              <a:spcAft>
-                <a:spcPts val="300"/>
-              </a:spcAft>
-              <a:buNone/>
-            </a:pPr>
-            <a:r>
-              <a:rPr lang="en-US" sz="1200" dirty="0">
-                <a:solidFill>
-                  <a:srgbClr val="1A1A1A"/>
-                </a:solidFill>
-                <a:latin typeface="Georgia" pitchFamily="34" charset="0"/>
-                <a:ea typeface="Georgia" pitchFamily="34" charset="-122"/>
-                <a:cs typeface="Georgia" pitchFamily="34" charset="-120"/>
-              </a:rPr>
-              <a:t>Students record a personal baseline for standard-algorithm column addition AND consider the question: was "Vedic mathematics" actually Vedic?</a:t>
-            </a:r>
-            <a:endParaRPr lang="en-US" sz="1200" dirty="0"/>
-          </a:p>
-        </p:txBody>
-      </p:sp>
-      <p:sp>
-        <p:nvSpPr>
-          <p:cNvPr id="7" name="Text 5"/>
-          <p:cNvSpPr/>
-          <p:nvPr/>
-        </p:nvSpPr>
-        <p:spPr>
-          <a:xfrm>
             <a:off x="406301" y="4434929"/>
             <a:ext cx="8498026" cy="213271"/>
           </a:xfrm>
@@ -2116,7 +2465,7 @@
                 <a:ea typeface="Times New Roman" pitchFamily="34" charset="-122"/>
                 <a:cs typeface="Times New Roman" pitchFamily="34" charset="-120"/>
               </a:rPr>
-              <a:t>Citation(s) used</a:t>
+              <a:t>Core (25 min) — The 16 sūtras and the provenance puzzle (cont.)</a:t>
             </a:r>
             <a:endParaRPr lang="en-US" sz="1800" dirty="0"/>
           </a:p>
@@ -2130,8 +2479,8 @@
         </p:nvSpPr>
         <p:spPr>
           <a:xfrm>
-            <a:off x="406301" y="870942"/>
-            <a:ext cx="8498026" cy="213271"/>
+            <a:off x="634901" y="883593"/>
+            <a:ext cx="8102798" cy="487561"/>
           </a:xfrm>
           <a:prstGeom prst="rect">
             <a:avLst/>
@@ -2143,20 +2492,18 @@
           <a:bodyPr wrap="square" lIns="0" tIns="0" rIns="0" bIns="0" rtlCol="0" anchor="t"/>
           <a:lstStyle/>
           <a:p>
-            <a:pPr algn="l" indent="0" marL="0">
-              <a:lnSpc>
-                <a:spcPts val="1680"/>
-              </a:lnSpc>
-              <a:spcBef>
-                <a:spcPts val="300"/>
-              </a:spcBef>
-              <a:spcAft>
-                <a:spcPts val="300"/>
-              </a:spcAft>
-              <a:buNone/>
-            </a:pPr>
-            <a:r>
-              <a:rPr lang="en-US" sz="1200" dirty="0">
+            <a:pPr algn="l" marL="342900" indent="-342900">
+              <a:lnSpc>
+                <a:spcPts val="1620"/>
+              </a:lnSpc>
+              <a:spcAft>
+                <a:spcPts val="300"/>
+              </a:spcAft>
+              <a:buSzPct val="100000"/>
+              <a:buChar char="•"/>
+            </a:pPr>
+            <a:r>
+              <a:rPr lang="en-US" sz="1200" b="1" dirty="0">
                 <a:solidFill>
                   <a:srgbClr val="1A1A1A"/>
                 </a:solidFill>
@@ -2164,22 +2511,19 @@
                 <a:ea typeface="Georgia" pitchFamily="34" charset="-122"/>
                 <a:cs typeface="Georgia" pitchFamily="34" charset="-120"/>
               </a:rPr>
-              <a:t>– Tirthaji (1965), </a:t>
-            </a:r>
-            <a:pPr algn="l" indent="0" marL="0">
-              <a:lnSpc>
-                <a:spcPts val="1680"/>
-              </a:lnSpc>
-              <a:spcBef>
-                <a:spcPts val="300"/>
-              </a:spcBef>
-              <a:spcAft>
-                <a:spcPts val="300"/>
-              </a:spcAft>
-              <a:buNone/>
-            </a:pPr>
-            <a:r>
-              <a:rPr lang="en-US" sz="1200" i="1" dirty="0">
+              <a:t>The puzzle:</a:t>
+            </a:r>
+            <a:pPr algn="l" indent="0" marL="0">
+              <a:lnSpc>
+                <a:spcPts val="1620"/>
+              </a:lnSpc>
+              <a:spcAft>
+                <a:spcPts val="300"/>
+              </a:spcAft>
+              <a:buNone/>
+            </a:pPr>
+            <a:r>
+              <a:rPr lang="en-US" sz="1200" dirty="0">
                 <a:solidFill>
                   <a:srgbClr val="1A1A1A"/>
                 </a:solidFill>
@@ -2187,22 +2531,19 @@
                 <a:ea typeface="Georgia" pitchFamily="34" charset="-122"/>
                 <a:cs typeface="Georgia" pitchFamily="34" charset="-120"/>
               </a:rPr>
-              <a:t>Vedic Mathematics</a:t>
-            </a:r>
-            <a:pPr algn="l" indent="0" marL="0">
-              <a:lnSpc>
-                <a:spcPts val="1680"/>
-              </a:lnSpc>
-              <a:spcBef>
-                <a:spcPts val="300"/>
-              </a:spcBef>
-              <a:spcAft>
-                <a:spcPts val="300"/>
-              </a:spcAft>
-              <a:buNone/>
-            </a:pPr>
-            <a:r>
-              <a:rPr lang="en-US" sz="1200" dirty="0">
+              <a:t> No other Sanskritist has ever produced the manuscript of this </a:t>
+            </a:r>
+            <a:pPr algn="l" indent="0" marL="0">
+              <a:lnSpc>
+                <a:spcPts val="1620"/>
+              </a:lnSpc>
+              <a:spcAft>
+                <a:spcPts val="300"/>
+              </a:spcAft>
+              <a:buNone/>
+            </a:pPr>
+            <a:r>
+              <a:rPr lang="en-US" sz="1200" i="1" dirty="0">
                 <a:solidFill>
                   <a:srgbClr val="1A1A1A"/>
                 </a:solidFill>
@@ -2210,45 +2551,19 @@
                 <a:ea typeface="Georgia" pitchFamily="34" charset="-122"/>
                 <a:cs typeface="Georgia" pitchFamily="34" charset="-120"/>
               </a:rPr>
-              <a:t>, Preface.</a:t>
-            </a:r>
-            <a:endParaRPr lang="en-US" sz="1200" dirty="0"/>
-          </a:p>
-        </p:txBody>
-      </p:sp>
-      <p:sp>
-        <p:nvSpPr>
-          <p:cNvPr id="5" name="Text 3"/>
-          <p:cNvSpPr/>
-          <p:nvPr/>
-        </p:nvSpPr>
-        <p:spPr>
-          <a:xfrm>
-            <a:off x="634901" y="1173063"/>
-            <a:ext cx="8102798" cy="281880"/>
-          </a:xfrm>
-          <a:prstGeom prst="rect">
-            <a:avLst/>
-          </a:prstGeom>
-          <a:noFill/>
-          <a:ln/>
-        </p:spPr>
-        <p:txBody>
-          <a:bodyPr wrap="square" lIns="0" tIns="0" rIns="0" bIns="0" rtlCol="0" anchor="t"/>
-          <a:lstStyle/>
-          <a:p>
-            <a:pPr algn="l" marL="342900" indent="-342900">
+              <a:t>Pariśiṣṭa</a:t>
+            </a:r>
+            <a:pPr algn="l" indent="0" marL="0">
               <a:lnSpc>
                 <a:spcPts val="1620"/>
               </a:lnSpc>
               <a:spcAft>
                 <a:spcPts val="300"/>
               </a:spcAft>
-              <a:buSzPct val="100000"/>
-              <a:buChar char="•"/>
-            </a:pPr>
-            <a:r>
-              <a:rPr lang="en-US" sz="1200" i="1" dirty="0">
+              <a:buNone/>
+            </a:pPr>
+            <a:r>
+              <a:rPr lang="en-US" sz="1200" dirty="0">
                 <a:solidFill>
                   <a:srgbClr val="1A1A1A"/>
                 </a:solidFill>
@@ -2256,19 +2571,45 @@
                 <a:ea typeface="Georgia" pitchFamily="34" charset="-122"/>
                 <a:cs typeface="Georgia" pitchFamily="34" charset="-120"/>
               </a:rPr>
-              <a:t>Microsoft Word - sutras1.pdf</a:t>
-            </a:r>
-            <a:pPr algn="l" indent="0" marL="0">
+              <a:t>. Tirthaji died (1960) before producing it; his book was published posthumously (1965).</a:t>
+            </a:r>
+            <a:endParaRPr lang="en-US" sz="1200" dirty="0"/>
+          </a:p>
+        </p:txBody>
+      </p:sp>
+      <p:sp>
+        <p:nvSpPr>
+          <p:cNvPr id="5" name="Text 3"/>
+          <p:cNvSpPr/>
+          <p:nvPr/>
+        </p:nvSpPr>
+        <p:spPr>
+          <a:xfrm>
+            <a:off x="634901" y="1472654"/>
+            <a:ext cx="8102798" cy="487561"/>
+          </a:xfrm>
+          <a:prstGeom prst="rect">
+            <a:avLst/>
+          </a:prstGeom>
+          <a:noFill/>
+          <a:ln/>
+        </p:spPr>
+        <p:txBody>
+          <a:bodyPr wrap="square" lIns="0" tIns="0" rIns="0" bIns="0" rtlCol="0" anchor="t"/>
+          <a:lstStyle/>
+          <a:p>
+            <a:pPr algn="l" marL="342900" indent="-342900">
               <a:lnSpc>
                 <a:spcPts val="1620"/>
               </a:lnSpc>
               <a:spcAft>
                 <a:spcPts val="300"/>
               </a:spcAft>
-              <a:buNone/>
-            </a:pPr>
-            <a:r>
-              <a:rPr lang="en-US" sz="1200" dirty="0">
+              <a:buSzPct val="100000"/>
+              <a:buChar char="•"/>
+            </a:pPr>
+            <a:r>
+              <a:rPr lang="en-US" sz="1200" b="1" dirty="0">
                 <a:solidFill>
                   <a:srgbClr val="1A1A1A"/>
                 </a:solidFill>
@@ -2276,6 +2617,1418 @@
                 <a:ea typeface="Georgia" pitchFamily="34" charset="-122"/>
                 <a:cs typeface="Georgia" pitchFamily="34" charset="-120"/>
               </a:rPr>
+              <a:t>What's at stake.</a:t>
+            </a:r>
+            <a:pPr algn="l" indent="0" marL="0">
+              <a:lnSpc>
+                <a:spcPts val="1620"/>
+              </a:lnSpc>
+              <a:spcAft>
+                <a:spcPts val="300"/>
+              </a:spcAft>
+              <a:buNone/>
+            </a:pPr>
+            <a:r>
+              <a:rPr lang="en-US" sz="1200" dirty="0">
+                <a:solidFill>
+                  <a:srgbClr val="1A1A1A"/>
+                </a:solidFill>
+                <a:latin typeface="Georgia" pitchFamily="34" charset="0"/>
+                <a:ea typeface="Georgia" pitchFamily="34" charset="-122"/>
+                <a:cs typeface="Georgia" pitchFamily="34" charset="-120"/>
+              </a:rPr>
+              <a:t> If the sūtras are Vedic, they're 3000+ years old — a major historical claim. If they're not, they're a brilliant 20th-century synthesis — </a:t>
+            </a:r>
+            <a:pPr algn="l" indent="0" marL="0">
+              <a:lnSpc>
+                <a:spcPts val="1620"/>
+              </a:lnSpc>
+              <a:spcAft>
+                <a:spcPts val="300"/>
+              </a:spcAft>
+              <a:buNone/>
+            </a:pPr>
+            <a:r>
+              <a:rPr lang="en-US" sz="1200" i="1" dirty="0">
+                <a:solidFill>
+                  <a:srgbClr val="1A1A1A"/>
+                </a:solidFill>
+                <a:latin typeface="Georgia" pitchFamily="34" charset="0"/>
+                <a:ea typeface="Georgia" pitchFamily="34" charset="-122"/>
+                <a:cs typeface="Georgia" pitchFamily="34" charset="-120"/>
+              </a:rPr>
+              <a:t>which would also be a real achievement, just a different one</a:t>
+            </a:r>
+            <a:pPr algn="l" indent="0" marL="0">
+              <a:lnSpc>
+                <a:spcPts val="1620"/>
+              </a:lnSpc>
+              <a:spcAft>
+                <a:spcPts val="300"/>
+              </a:spcAft>
+              <a:buNone/>
+            </a:pPr>
+            <a:r>
+              <a:rPr lang="en-US" sz="1200" dirty="0">
+                <a:solidFill>
+                  <a:srgbClr val="1A1A1A"/>
+                </a:solidFill>
+                <a:latin typeface="Georgia" pitchFamily="34" charset="0"/>
+                <a:ea typeface="Georgia" pitchFamily="34" charset="-122"/>
+                <a:cs typeface="Georgia" pitchFamily="34" charset="-120"/>
+              </a:rPr>
+              <a:t>.</a:t>
+            </a:r>
+            <a:endParaRPr lang="en-US" sz="1200" dirty="0"/>
+          </a:p>
+        </p:txBody>
+      </p:sp>
+      <p:sp>
+        <p:nvSpPr>
+          <p:cNvPr id="6" name="Text 4"/>
+          <p:cNvSpPr/>
+          <p:nvPr/>
+        </p:nvSpPr>
+        <p:spPr>
+          <a:xfrm>
+            <a:off x="406301" y="4434929"/>
+            <a:ext cx="8498026" cy="213271"/>
+          </a:xfrm>
+          <a:prstGeom prst="rect">
+            <a:avLst/>
+          </a:prstGeom>
+          <a:noFill/>
+          <a:ln/>
+        </p:spPr>
+        <p:txBody>
+          <a:bodyPr wrap="square" lIns="0" tIns="0" rIns="0" bIns="0" rtlCol="0" anchor="t"/>
+          <a:lstStyle/>
+          <a:p>
+            <a:pPr algn="l" indent="0" marL="0">
+              <a:lnSpc>
+                <a:spcPts val="1680"/>
+              </a:lnSpc>
+              <a:spcBef>
+                <a:spcPts val="300"/>
+              </a:spcBef>
+              <a:spcAft>
+                <a:spcPts val="300"/>
+              </a:spcAft>
+              <a:buNone/>
+            </a:pPr>
+            <a:r>
+              <a:rPr lang="en-US" sz="1200" dirty="0">
+                <a:solidFill>
+                  <a:srgbClr val="1A1A1A"/>
+                </a:solidFill>
+                <a:latin typeface="Georgia" pitchFamily="34" charset="0"/>
+                <a:ea typeface="Georgia" pitchFamily="34" charset="-122"/>
+                <a:cs typeface="Georgia" pitchFamily="34" charset="-120"/>
+              </a:rPr>
+              <a:t>Senior ·  · IKS Curriculum</a:t>
+            </a:r>
+            <a:endParaRPr lang="en-US" sz="1200" dirty="0"/>
+          </a:p>
+        </p:txBody>
+      </p:sp>
+    </p:spTree>
+  </p:cSld>
+  <p:clrMapOvr>
+    <a:masterClrMapping/>
+  </p:clrMapOvr>
+</p:sld>
+</file>
+
+<file path=ppt/slides/slide11.xml><?xml version="1.0" encoding="utf-8"?>
+<p:sld xmlns:a="http://schemas.openxmlformats.org/drawingml/2006/main" xmlns:r="http://schemas.openxmlformats.org/officeDocument/2006/relationships" xmlns:p="http://schemas.openxmlformats.org/presentationml/2006/main">
+  <p:cSld name="Slide 11">
+    <p:bg>
+      <p:bgPr>
+        <a:solidFill>
+          <a:srgbClr val="FAF7F2"/>
+        </a:solidFill>
+      </p:bgPr>
+    </p:bg>
+    <p:spTree>
+      <p:nvGrpSpPr>
+        <p:cNvPr id="1" name=""/>
+        <p:cNvGrpSpPr/>
+        <p:nvPr/>
+      </p:nvGrpSpPr>
+      <p:grpSpPr>
+        <a:xfrm>
+          <a:off x="0" y="0"/>
+          <a:ext cx="0" cy="0"/>
+          <a:chOff x="0" y="0"/>
+          <a:chExt cx="0" cy="0"/>
+        </a:xfrm>
+      </p:grpSpPr>
+      <p:sp>
+        <p:nvSpPr>
+          <p:cNvPr id="2" name="Text 0"/>
+          <p:cNvSpPr/>
+          <p:nvPr/>
+        </p:nvSpPr>
+        <p:spPr>
+          <a:xfrm>
+            <a:off x="0" y="0"/>
+            <a:ext cx="9144000" cy="101501"/>
+          </a:xfrm>
+          <a:prstGeom prst="rect">
+            <a:avLst/>
+          </a:prstGeom>
+          <a:solidFill>
+            <a:srgbClr val="5D1D2E"/>
+          </a:solidFill>
+          <a:ln/>
+        </p:spPr>
+        <p:txBody>
+          <a:bodyPr wrap="square" rtlCol="0" anchor="ctr"/>
+          <a:lstStyle/>
+          <a:p>
+            <a:pPr indent="0" marL="0">
+              <a:buNone/>
+            </a:pPr>
+            <a:endParaRPr lang="en-US" dirty="0"/>
+          </a:p>
+        </p:txBody>
+      </p:sp>
+      <p:sp>
+        <p:nvSpPr>
+          <p:cNvPr id="3" name="Text 1"/>
+          <p:cNvSpPr/>
+          <p:nvPr/>
+        </p:nvSpPr>
+        <p:spPr>
+          <a:xfrm>
+            <a:off x="406301" y="457051"/>
+            <a:ext cx="8498026" cy="274290"/>
+          </a:xfrm>
+          <a:prstGeom prst="rect">
+            <a:avLst/>
+          </a:prstGeom>
+          <a:noFill/>
+          <a:ln/>
+        </p:spPr>
+        <p:txBody>
+          <a:bodyPr wrap="square" lIns="0" tIns="0" rIns="0" bIns="0" rtlCol="0" anchor="t"/>
+          <a:lstStyle/>
+          <a:p>
+            <a:pPr algn="l" indent="0" marL="0">
+              <a:lnSpc>
+                <a:spcPts val="2160"/>
+              </a:lnSpc>
+              <a:spcBef>
+                <a:spcPts val="600"/>
+              </a:spcBef>
+              <a:spcAft>
+                <a:spcPts val="800"/>
+              </a:spcAft>
+              <a:buNone/>
+            </a:pPr>
+            <a:r>
+              <a:rPr lang="en-US" sz="1800" b="1" dirty="0">
+                <a:solidFill>
+                  <a:srgbClr val="997929"/>
+                </a:solidFill>
+                <a:latin typeface="Times New Roman" pitchFamily="34" charset="0"/>
+                <a:ea typeface="Times New Roman" pitchFamily="34" charset="-122"/>
+                <a:cs typeface="Times New Roman" pitchFamily="34" charset="-120"/>
+              </a:rPr>
+              <a:t>Core (25 min) — The 16 sūtras and the provenance puzzle (cont.)</a:t>
+            </a:r>
+            <a:endParaRPr lang="en-US" sz="1800" dirty="0"/>
+          </a:p>
+        </p:txBody>
+      </p:sp>
+      <p:sp>
+        <p:nvSpPr>
+          <p:cNvPr id="4" name="Text 2"/>
+          <p:cNvSpPr/>
+          <p:nvPr/>
+        </p:nvSpPr>
+        <p:spPr>
+          <a:xfrm>
+            <a:off x="634901" y="883593"/>
+            <a:ext cx="8102798" cy="281880"/>
+          </a:xfrm>
+          <a:prstGeom prst="rect">
+            <a:avLst/>
+          </a:prstGeom>
+          <a:noFill/>
+          <a:ln/>
+        </p:spPr>
+        <p:txBody>
+          <a:bodyPr wrap="square" lIns="0" tIns="0" rIns="0" bIns="0" rtlCol="0" anchor="t"/>
+          <a:lstStyle/>
+          <a:p>
+            <a:pPr algn="l" marL="342900" indent="-342900">
+              <a:lnSpc>
+                <a:spcPts val="1620"/>
+              </a:lnSpc>
+              <a:spcAft>
+                <a:spcPts val="300"/>
+              </a:spcAft>
+              <a:buSzPct val="100000"/>
+              <a:buChar char="•"/>
+            </a:pPr>
+            <a:r>
+              <a:rPr lang="en-US" sz="1200" b="1" dirty="0">
+                <a:solidFill>
+                  <a:srgbClr val="1A1A1A"/>
+                </a:solidFill>
+                <a:latin typeface="Georgia" pitchFamily="34" charset="0"/>
+                <a:ea typeface="Georgia" pitchFamily="34" charset="-122"/>
+                <a:cs typeface="Georgia" pitchFamily="34" charset="-120"/>
+              </a:rPr>
+              <a:t>Preview Day 6.</a:t>
+            </a:r>
+            <a:pPr algn="l" indent="0" marL="0">
+              <a:lnSpc>
+                <a:spcPts val="1620"/>
+              </a:lnSpc>
+              <a:spcAft>
+                <a:spcPts val="300"/>
+              </a:spcAft>
+              <a:buNone/>
+            </a:pPr>
+            <a:r>
+              <a:rPr lang="en-US" sz="1200" dirty="0">
+                <a:solidFill>
+                  <a:srgbClr val="1A1A1A"/>
+                </a:solidFill>
+                <a:latin typeface="Georgia" pitchFamily="34" charset="0"/>
+                <a:ea typeface="Georgia" pitchFamily="34" charset="-122"/>
+                <a:cs typeface="Georgia" pitchFamily="34" charset="-120"/>
+              </a:rPr>
+              <a:t> </a:t>
+            </a:r>
+            <a:pPr algn="l" indent="0" marL="0">
+              <a:lnSpc>
+                <a:spcPts val="1620"/>
+              </a:lnSpc>
+              <a:spcAft>
+                <a:spcPts val="300"/>
+              </a:spcAft>
+              <a:buNone/>
+            </a:pPr>
+            <a:r>
+              <a:rPr lang="en-US" sz="1200" i="1" dirty="0">
+                <a:solidFill>
+                  <a:srgbClr val="1A1A1A"/>
+                </a:solidFill>
+                <a:latin typeface="Georgia" pitchFamily="34" charset="0"/>
+                <a:ea typeface="Georgia" pitchFamily="34" charset="-122"/>
+                <a:cs typeface="Georgia" pitchFamily="34" charset="-120"/>
+              </a:rPr>
+              <a:t>"Day 6 we read the scholarly critique by S. G. Dani (1993). For now, hold the question open."</a:t>
+            </a:r>
+            <a:endParaRPr lang="en-US" sz="1200" dirty="0"/>
+          </a:p>
+        </p:txBody>
+      </p:sp>
+      <p:sp>
+        <p:nvSpPr>
+          <p:cNvPr id="5" name="Text 3"/>
+          <p:cNvSpPr/>
+          <p:nvPr/>
+        </p:nvSpPr>
+        <p:spPr>
+          <a:xfrm>
+            <a:off x="406301" y="4434929"/>
+            <a:ext cx="8498026" cy="213271"/>
+          </a:xfrm>
+          <a:prstGeom prst="rect">
+            <a:avLst/>
+          </a:prstGeom>
+          <a:noFill/>
+          <a:ln/>
+        </p:spPr>
+        <p:txBody>
+          <a:bodyPr wrap="square" lIns="0" tIns="0" rIns="0" bIns="0" rtlCol="0" anchor="t"/>
+          <a:lstStyle/>
+          <a:p>
+            <a:pPr algn="l" indent="0" marL="0">
+              <a:lnSpc>
+                <a:spcPts val="1680"/>
+              </a:lnSpc>
+              <a:spcBef>
+                <a:spcPts val="300"/>
+              </a:spcBef>
+              <a:spcAft>
+                <a:spcPts val="300"/>
+              </a:spcAft>
+              <a:buNone/>
+            </a:pPr>
+            <a:r>
+              <a:rPr lang="en-US" sz="1200" dirty="0">
+                <a:solidFill>
+                  <a:srgbClr val="1A1A1A"/>
+                </a:solidFill>
+                <a:latin typeface="Georgia" pitchFamily="34" charset="0"/>
+                <a:ea typeface="Georgia" pitchFamily="34" charset="-122"/>
+                <a:cs typeface="Georgia" pitchFamily="34" charset="-120"/>
+              </a:rPr>
+              <a:t>Senior ·  · IKS Curriculum</a:t>
+            </a:r>
+            <a:endParaRPr lang="en-US" sz="1200" dirty="0"/>
+          </a:p>
+        </p:txBody>
+      </p:sp>
+    </p:spTree>
+  </p:cSld>
+  <p:clrMapOvr>
+    <a:masterClrMapping/>
+  </p:clrMapOvr>
+</p:sld>
+</file>
+
+<file path=ppt/slides/slide12.xml><?xml version="1.0" encoding="utf-8"?>
+<p:sld xmlns:a="http://schemas.openxmlformats.org/drawingml/2006/main" xmlns:r="http://schemas.openxmlformats.org/officeDocument/2006/relationships" xmlns:p="http://schemas.openxmlformats.org/presentationml/2006/main">
+  <p:cSld name="Slide 12">
+    <p:bg>
+      <p:bgPr>
+        <a:solidFill>
+          <a:srgbClr val="FAF7F2"/>
+        </a:solidFill>
+      </p:bgPr>
+    </p:bg>
+    <p:spTree>
+      <p:nvGrpSpPr>
+        <p:cNvPr id="1" name=""/>
+        <p:cNvGrpSpPr/>
+        <p:nvPr/>
+      </p:nvGrpSpPr>
+      <p:grpSpPr>
+        <a:xfrm>
+          <a:off x="0" y="0"/>
+          <a:ext cx="0" cy="0"/>
+          <a:chOff x="0" y="0"/>
+          <a:chExt cx="0" cy="0"/>
+        </a:xfrm>
+      </p:grpSpPr>
+      <p:sp>
+        <p:nvSpPr>
+          <p:cNvPr id="2" name="Text 0"/>
+          <p:cNvSpPr/>
+          <p:nvPr/>
+        </p:nvSpPr>
+        <p:spPr>
+          <a:xfrm>
+            <a:off x="0" y="0"/>
+            <a:ext cx="9144000" cy="101501"/>
+          </a:xfrm>
+          <a:prstGeom prst="rect">
+            <a:avLst/>
+          </a:prstGeom>
+          <a:solidFill>
+            <a:srgbClr val="5D1D2E"/>
+          </a:solidFill>
+          <a:ln/>
+        </p:spPr>
+        <p:txBody>
+          <a:bodyPr wrap="square" rtlCol="0" anchor="ctr"/>
+          <a:lstStyle/>
+          <a:p>
+            <a:pPr indent="0" marL="0">
+              <a:buNone/>
+            </a:pPr>
+            <a:endParaRPr lang="en-US" dirty="0"/>
+          </a:p>
+        </p:txBody>
+      </p:sp>
+      <p:sp>
+        <p:nvSpPr>
+          <p:cNvPr id="3" name="Text 1"/>
+          <p:cNvSpPr/>
+          <p:nvPr/>
+        </p:nvSpPr>
+        <p:spPr>
+          <a:xfrm>
+            <a:off x="406301" y="457051"/>
+            <a:ext cx="8498026" cy="274290"/>
+          </a:xfrm>
+          <a:prstGeom prst="rect">
+            <a:avLst/>
+          </a:prstGeom>
+          <a:noFill/>
+          <a:ln/>
+        </p:spPr>
+        <p:txBody>
+          <a:bodyPr wrap="square" lIns="0" tIns="0" rIns="0" bIns="0" rtlCol="0" anchor="t"/>
+          <a:lstStyle/>
+          <a:p>
+            <a:pPr algn="l" indent="0" marL="0">
+              <a:lnSpc>
+                <a:spcPts val="2160"/>
+              </a:lnSpc>
+              <a:spcBef>
+                <a:spcPts val="600"/>
+              </a:spcBef>
+              <a:spcAft>
+                <a:spcPts val="800"/>
+              </a:spcAft>
+              <a:buNone/>
+            </a:pPr>
+            <a:r>
+              <a:rPr lang="en-US" sz="1800" b="1" dirty="0">
+                <a:solidFill>
+                  <a:srgbClr val="997929"/>
+                </a:solidFill>
+                <a:latin typeface="Times New Roman" pitchFamily="34" charset="0"/>
+                <a:ea typeface="Times New Roman" pitchFamily="34" charset="-122"/>
+                <a:cs typeface="Times New Roman" pitchFamily="34" charset="-120"/>
+              </a:rPr>
+              <a:t>Wrap-up (10 min)</a:t>
+            </a:r>
+            <a:endParaRPr lang="en-US" sz="1800" dirty="0"/>
+          </a:p>
+        </p:txBody>
+      </p:sp>
+      <p:sp>
+        <p:nvSpPr>
+          <p:cNvPr id="4" name="Text 2"/>
+          <p:cNvSpPr/>
+          <p:nvPr/>
+        </p:nvSpPr>
+        <p:spPr>
+          <a:xfrm>
+            <a:off x="634901" y="883593"/>
+            <a:ext cx="8102798" cy="1500783"/>
+          </a:xfrm>
+          <a:prstGeom prst="rect">
+            <a:avLst/>
+          </a:prstGeom>
+          <a:noFill/>
+          <a:ln/>
+        </p:spPr>
+        <p:txBody>
+          <a:bodyPr wrap="square" lIns="0" tIns="0" rIns="0" bIns="0" rtlCol="0" anchor="t"/>
+          <a:lstStyle/>
+          <a:p>
+            <a:pPr algn="l" marL="342900" indent="-342900">
+              <a:lnSpc>
+                <a:spcPts val="1620"/>
+              </a:lnSpc>
+              <a:spcAft>
+                <a:spcPts val="300"/>
+              </a:spcAft>
+              <a:buSzPct val="100000"/>
+              <a:buChar char="•"/>
+            </a:pPr>
+            <a:r>
+              <a:rPr lang="en-US" sz="1200" dirty="0">
+                <a:solidFill>
+                  <a:srgbClr val="1A1A1A"/>
+                </a:solidFill>
+                <a:latin typeface="Georgia" pitchFamily="34" charset="0"/>
+                <a:ea typeface="Georgia" pitchFamily="34" charset="-122"/>
+                <a:cs typeface="Georgia" pitchFamily="34" charset="-120"/>
+              </a:rPr>
+              <a:t>Quick survey on the board:</a:t>
+            </a:r>
+            <a:endParaRPr lang="en-US" sz="1200" dirty="0"/>
+          </a:p>
+          <a:p>
+            <a:pPr algn="l" marL="342900" indent="-342900">
+              <a:lnSpc>
+                <a:spcPts val="1620"/>
+              </a:lnSpc>
+              <a:spcAft>
+                <a:spcPts val="300"/>
+              </a:spcAft>
+              <a:buSzPct val="100000"/>
+              <a:buChar char="•"/>
+            </a:pPr>
+            <a:r>
+              <a:rPr lang="en-US" sz="1200" dirty="0">
+                <a:solidFill>
+                  <a:srgbClr val="1A1A1A"/>
+                </a:solidFill>
+                <a:latin typeface="Georgia" pitchFamily="34" charset="0"/>
+                <a:ea typeface="Georgia" pitchFamily="34" charset="-122"/>
+                <a:cs typeface="Georgia" pitchFamily="34" charset="-120"/>
+              </a:rPr>
+              <a:t>Hands up if you think the sūtras are likely Vedic.</a:t>
+            </a:r>
+            <a:endParaRPr lang="en-US" sz="1200" dirty="0"/>
+          </a:p>
+          <a:p>
+            <a:pPr algn="l" marL="342900" indent="-342900">
+              <a:lnSpc>
+                <a:spcPts val="1620"/>
+              </a:lnSpc>
+              <a:spcAft>
+                <a:spcPts val="300"/>
+              </a:spcAft>
+              <a:buSzPct val="100000"/>
+              <a:buChar char="•"/>
+            </a:pPr>
+            <a:r>
+              <a:rPr lang="en-US" sz="1200" dirty="0">
+                <a:solidFill>
+                  <a:srgbClr val="1A1A1A"/>
+                </a:solidFill>
+                <a:latin typeface="Georgia" pitchFamily="34" charset="0"/>
+                <a:ea typeface="Georgia" pitchFamily="34" charset="-122"/>
+                <a:cs typeface="Georgia" pitchFamily="34" charset="-120"/>
+              </a:rPr>
+              <a:t>Hands up if you think they're more likely 20th-century.</a:t>
+            </a:r>
+            <a:endParaRPr lang="en-US" sz="1200" dirty="0"/>
+          </a:p>
+          <a:p>
+            <a:pPr algn="l" marL="342900" indent="-342900">
+              <a:lnSpc>
+                <a:spcPts val="1620"/>
+              </a:lnSpc>
+              <a:spcAft>
+                <a:spcPts val="300"/>
+              </a:spcAft>
+              <a:buSzPct val="100000"/>
+              <a:buChar char="•"/>
+            </a:pPr>
+            <a:r>
+              <a:rPr lang="en-US" sz="1200" dirty="0">
+                <a:solidFill>
+                  <a:srgbClr val="1A1A1A"/>
+                </a:solidFill>
+                <a:latin typeface="Georgia" pitchFamily="34" charset="0"/>
+                <a:ea typeface="Georgia" pitchFamily="34" charset="-122"/>
+                <a:cs typeface="Georgia" pitchFamily="34" charset="-120"/>
+              </a:rPr>
+              <a:t>Hands up if you don't know yet.</a:t>
+            </a:r>
+            <a:endParaRPr lang="en-US" sz="1200" dirty="0"/>
+          </a:p>
+          <a:p>
+            <a:pPr algn="l" marL="342900" indent="-342900">
+              <a:lnSpc>
+                <a:spcPts val="1620"/>
+              </a:lnSpc>
+              <a:spcAft>
+                <a:spcPts val="300"/>
+              </a:spcAft>
+              <a:buSzPct val="100000"/>
+              <a:buChar char="•"/>
+            </a:pPr>
+            <a:r>
+              <a:rPr lang="en-US" sz="1200" dirty="0">
+                <a:solidFill>
+                  <a:srgbClr val="1A1A1A"/>
+                </a:solidFill>
+                <a:latin typeface="Georgia" pitchFamily="34" charset="0"/>
+                <a:ea typeface="Georgia" pitchFamily="34" charset="-122"/>
+                <a:cs typeface="Georgia" pitchFamily="34" charset="-120"/>
+              </a:rPr>
+              <a:t>Discuss the distribution.</a:t>
+            </a:r>
+            <a:endParaRPr lang="en-US" sz="1200" dirty="0"/>
+          </a:p>
+          <a:p>
+            <a:pPr algn="l" marL="342900" indent="-342900">
+              <a:lnSpc>
+                <a:spcPts val="1620"/>
+              </a:lnSpc>
+              <a:spcAft>
+                <a:spcPts val="300"/>
+              </a:spcAft>
+              <a:buSzPct val="100000"/>
+              <a:buChar char="•"/>
+            </a:pPr>
+            <a:r>
+              <a:rPr lang="en-US" sz="1200" dirty="0">
+                <a:solidFill>
+                  <a:srgbClr val="1A1A1A"/>
+                </a:solidFill>
+                <a:latin typeface="Georgia" pitchFamily="34" charset="0"/>
+                <a:ea typeface="Georgia" pitchFamily="34" charset="-122"/>
+                <a:cs typeface="Georgia" pitchFamily="34" charset="-120"/>
+              </a:rPr>
+              <a:t>Homework: read Tirthaji's preface (handout). Bring questions.</a:t>
+            </a:r>
+            <a:endParaRPr lang="en-US" sz="1200" dirty="0"/>
+          </a:p>
+        </p:txBody>
+      </p:sp>
+      <p:sp>
+        <p:nvSpPr>
+          <p:cNvPr id="5" name="Text 3"/>
+          <p:cNvSpPr/>
+          <p:nvPr/>
+        </p:nvSpPr>
+        <p:spPr>
+          <a:xfrm>
+            <a:off x="406301" y="4434929"/>
+            <a:ext cx="8498026" cy="213271"/>
+          </a:xfrm>
+          <a:prstGeom prst="rect">
+            <a:avLst/>
+          </a:prstGeom>
+          <a:noFill/>
+          <a:ln/>
+        </p:spPr>
+        <p:txBody>
+          <a:bodyPr wrap="square" lIns="0" tIns="0" rIns="0" bIns="0" rtlCol="0" anchor="t"/>
+          <a:lstStyle/>
+          <a:p>
+            <a:pPr algn="l" indent="0" marL="0">
+              <a:lnSpc>
+                <a:spcPts val="1680"/>
+              </a:lnSpc>
+              <a:spcBef>
+                <a:spcPts val="300"/>
+              </a:spcBef>
+              <a:spcAft>
+                <a:spcPts val="300"/>
+              </a:spcAft>
+              <a:buNone/>
+            </a:pPr>
+            <a:r>
+              <a:rPr lang="en-US" sz="1200" dirty="0">
+                <a:solidFill>
+                  <a:srgbClr val="1A1A1A"/>
+                </a:solidFill>
+                <a:latin typeface="Georgia" pitchFamily="34" charset="0"/>
+                <a:ea typeface="Georgia" pitchFamily="34" charset="-122"/>
+                <a:cs typeface="Georgia" pitchFamily="34" charset="-120"/>
+              </a:rPr>
+              <a:t>Senior ·  · IKS Curriculum</a:t>
+            </a:r>
+            <a:endParaRPr lang="en-US" sz="1200" dirty="0"/>
+          </a:p>
+        </p:txBody>
+      </p:sp>
+    </p:spTree>
+  </p:cSld>
+  <p:clrMapOvr>
+    <a:masterClrMapping/>
+  </p:clrMapOvr>
+</p:sld>
+</file>
+
+<file path=ppt/slides/slide13.xml><?xml version="1.0" encoding="utf-8"?>
+<p:sld xmlns:a="http://schemas.openxmlformats.org/drawingml/2006/main" xmlns:r="http://schemas.openxmlformats.org/officeDocument/2006/relationships" xmlns:p="http://schemas.openxmlformats.org/presentationml/2006/main">
+  <p:cSld name="Slide 13">
+    <p:bg>
+      <p:bgPr>
+        <a:solidFill>
+          <a:srgbClr val="FAF7F2"/>
+        </a:solidFill>
+      </p:bgPr>
+    </p:bg>
+    <p:spTree>
+      <p:nvGrpSpPr>
+        <p:cNvPr id="1" name=""/>
+        <p:cNvGrpSpPr/>
+        <p:nvPr/>
+      </p:nvGrpSpPr>
+      <p:grpSpPr>
+        <a:xfrm>
+          <a:off x="0" y="0"/>
+          <a:ext cx="0" cy="0"/>
+          <a:chOff x="0" y="0"/>
+          <a:chExt cx="0" cy="0"/>
+        </a:xfrm>
+      </p:grpSpPr>
+      <p:sp>
+        <p:nvSpPr>
+          <p:cNvPr id="2" name="Text 0"/>
+          <p:cNvSpPr/>
+          <p:nvPr/>
+        </p:nvSpPr>
+        <p:spPr>
+          <a:xfrm>
+            <a:off x="0" y="0"/>
+            <a:ext cx="9144000" cy="101501"/>
+          </a:xfrm>
+          <a:prstGeom prst="rect">
+            <a:avLst/>
+          </a:prstGeom>
+          <a:solidFill>
+            <a:srgbClr val="5D1D2E"/>
+          </a:solidFill>
+          <a:ln/>
+        </p:spPr>
+        <p:txBody>
+          <a:bodyPr wrap="square" rtlCol="0" anchor="ctr"/>
+          <a:lstStyle/>
+          <a:p>
+            <a:pPr indent="0" marL="0">
+              <a:buNone/>
+            </a:pPr>
+            <a:endParaRPr lang="en-US" dirty="0"/>
+          </a:p>
+        </p:txBody>
+      </p:sp>
+      <p:sp>
+        <p:nvSpPr>
+          <p:cNvPr id="3" name="Text 1"/>
+          <p:cNvSpPr/>
+          <p:nvPr/>
+        </p:nvSpPr>
+        <p:spPr>
+          <a:xfrm>
+            <a:off x="406301" y="457051"/>
+            <a:ext cx="8498026" cy="274290"/>
+          </a:xfrm>
+          <a:prstGeom prst="rect">
+            <a:avLst/>
+          </a:prstGeom>
+          <a:noFill/>
+          <a:ln/>
+        </p:spPr>
+        <p:txBody>
+          <a:bodyPr wrap="square" lIns="0" tIns="0" rIns="0" bIns="0" rtlCol="0" anchor="t"/>
+          <a:lstStyle/>
+          <a:p>
+            <a:pPr algn="l" indent="0" marL="0">
+              <a:lnSpc>
+                <a:spcPts val="2160"/>
+              </a:lnSpc>
+              <a:spcBef>
+                <a:spcPts val="600"/>
+              </a:spcBef>
+              <a:spcAft>
+                <a:spcPts val="800"/>
+              </a:spcAft>
+              <a:buNone/>
+            </a:pPr>
+            <a:r>
+              <a:rPr lang="en-US" sz="1800" b="1" dirty="0">
+                <a:solidFill>
+                  <a:srgbClr val="997929"/>
+                </a:solidFill>
+                <a:latin typeface="Times New Roman" pitchFamily="34" charset="0"/>
+                <a:ea typeface="Times New Roman" pitchFamily="34" charset="-122"/>
+                <a:cs typeface="Times New Roman" pitchFamily="34" charset="-120"/>
+              </a:rPr>
+              <a:t>Differentiation</a:t>
+            </a:r>
+            <a:endParaRPr lang="en-US" sz="1800" dirty="0"/>
+          </a:p>
+        </p:txBody>
+      </p:sp>
+      <p:sp>
+        <p:nvSpPr>
+          <p:cNvPr id="4" name="Text 2"/>
+          <p:cNvSpPr/>
+          <p:nvPr/>
+        </p:nvSpPr>
+        <p:spPr>
+          <a:xfrm>
+            <a:off x="634901" y="883593"/>
+            <a:ext cx="8102798" cy="731341"/>
+          </a:xfrm>
+          <a:prstGeom prst="rect">
+            <a:avLst/>
+          </a:prstGeom>
+          <a:noFill/>
+          <a:ln/>
+        </p:spPr>
+        <p:txBody>
+          <a:bodyPr wrap="square" lIns="0" tIns="0" rIns="0" bIns="0" rtlCol="0" anchor="t"/>
+          <a:lstStyle/>
+          <a:p>
+            <a:pPr algn="l" marL="342900" indent="-342900">
+              <a:lnSpc>
+                <a:spcPts val="1620"/>
+              </a:lnSpc>
+              <a:spcAft>
+                <a:spcPts val="300"/>
+              </a:spcAft>
+              <a:buSzPct val="100000"/>
+              <a:buChar char="•"/>
+            </a:pPr>
+            <a:r>
+              <a:rPr lang="en-US" sz="1200" b="1" dirty="0">
+                <a:solidFill>
+                  <a:srgbClr val="1A1A1A"/>
+                </a:solidFill>
+                <a:latin typeface="Georgia" pitchFamily="34" charset="0"/>
+                <a:ea typeface="Georgia" pitchFamily="34" charset="-122"/>
+                <a:cs typeface="Georgia" pitchFamily="34" charset="-120"/>
+              </a:rPr>
+              <a:t>Tier up:</a:t>
+            </a:r>
+            <a:pPr algn="l" indent="0" marL="0">
+              <a:lnSpc>
+                <a:spcPts val="1620"/>
+              </a:lnSpc>
+              <a:spcAft>
+                <a:spcPts val="300"/>
+              </a:spcAft>
+              <a:buNone/>
+            </a:pPr>
+            <a:r>
+              <a:rPr lang="en-US" sz="1200" dirty="0">
+                <a:solidFill>
+                  <a:srgbClr val="1A1A1A"/>
+                </a:solidFill>
+                <a:latin typeface="Georgia" pitchFamily="34" charset="0"/>
+                <a:ea typeface="Georgia" pitchFamily="34" charset="-122"/>
+                <a:cs typeface="Georgia" pitchFamily="34" charset="-120"/>
+              </a:rPr>
+              <a:t> Read Plofker (2009), Ch. 1 — the broader history of Indian mathematics. What was happening in the 19th–early 20th c. that might explain Tirthaji's project?</a:t>
+            </a:r>
+            <a:endParaRPr lang="en-US" sz="1200" dirty="0"/>
+          </a:p>
+          <a:p>
+            <a:pPr algn="l" marL="342900" indent="-342900">
+              <a:lnSpc>
+                <a:spcPts val="1620"/>
+              </a:lnSpc>
+              <a:spcAft>
+                <a:spcPts val="300"/>
+              </a:spcAft>
+              <a:buSzPct val="100000"/>
+              <a:buChar char="•"/>
+            </a:pPr>
+            <a:r>
+              <a:rPr lang="en-US" sz="1200" b="1" dirty="0">
+                <a:solidFill>
+                  <a:srgbClr val="1A1A1A"/>
+                </a:solidFill>
+                <a:latin typeface="Georgia" pitchFamily="34" charset="0"/>
+                <a:ea typeface="Georgia" pitchFamily="34" charset="-122"/>
+                <a:cs typeface="Georgia" pitchFamily="34" charset="-120"/>
+              </a:rPr>
+              <a:t>Tier down:</a:t>
+            </a:r>
+            <a:pPr algn="l" indent="0" marL="0">
+              <a:lnSpc>
+                <a:spcPts val="1620"/>
+              </a:lnSpc>
+              <a:spcAft>
+                <a:spcPts val="300"/>
+              </a:spcAft>
+              <a:buNone/>
+            </a:pPr>
+            <a:r>
+              <a:rPr lang="en-US" sz="1200" dirty="0">
+                <a:solidFill>
+                  <a:srgbClr val="1A1A1A"/>
+                </a:solidFill>
+                <a:latin typeface="Georgia" pitchFamily="34" charset="0"/>
+                <a:ea typeface="Georgia" pitchFamily="34" charset="-122"/>
+                <a:cs typeface="Georgia" pitchFamily="34" charset="-120"/>
+              </a:rPr>
+              <a:t> Focus on memorising the 16 sūtra names this week. The provenance question deepens at Day 6.</a:t>
+            </a:r>
+            <a:endParaRPr lang="en-US" sz="1200" dirty="0"/>
+          </a:p>
+        </p:txBody>
+      </p:sp>
+      <p:sp>
+        <p:nvSpPr>
+          <p:cNvPr id="5" name="Text 3"/>
+          <p:cNvSpPr/>
+          <p:nvPr/>
+        </p:nvSpPr>
+        <p:spPr>
+          <a:xfrm>
+            <a:off x="406301" y="4434929"/>
+            <a:ext cx="8498026" cy="213271"/>
+          </a:xfrm>
+          <a:prstGeom prst="rect">
+            <a:avLst/>
+          </a:prstGeom>
+          <a:noFill/>
+          <a:ln/>
+        </p:spPr>
+        <p:txBody>
+          <a:bodyPr wrap="square" lIns="0" tIns="0" rIns="0" bIns="0" rtlCol="0" anchor="t"/>
+          <a:lstStyle/>
+          <a:p>
+            <a:pPr algn="l" indent="0" marL="0">
+              <a:lnSpc>
+                <a:spcPts val="1680"/>
+              </a:lnSpc>
+              <a:spcBef>
+                <a:spcPts val="300"/>
+              </a:spcBef>
+              <a:spcAft>
+                <a:spcPts val="300"/>
+              </a:spcAft>
+              <a:buNone/>
+            </a:pPr>
+            <a:r>
+              <a:rPr lang="en-US" sz="1200" dirty="0">
+                <a:solidFill>
+                  <a:srgbClr val="1A1A1A"/>
+                </a:solidFill>
+                <a:latin typeface="Georgia" pitchFamily="34" charset="0"/>
+                <a:ea typeface="Georgia" pitchFamily="34" charset="-122"/>
+                <a:cs typeface="Georgia" pitchFamily="34" charset="-120"/>
+              </a:rPr>
+              <a:t>Senior ·  · IKS Curriculum</a:t>
+            </a:r>
+            <a:endParaRPr lang="en-US" sz="1200" dirty="0"/>
+          </a:p>
+        </p:txBody>
+      </p:sp>
+    </p:spTree>
+  </p:cSld>
+  <p:clrMapOvr>
+    <a:masterClrMapping/>
+  </p:clrMapOvr>
+</p:sld>
+</file>
+
+<file path=ppt/slides/slide14.xml><?xml version="1.0" encoding="utf-8"?>
+<p:sld xmlns:a="http://schemas.openxmlformats.org/drawingml/2006/main" xmlns:r="http://schemas.openxmlformats.org/officeDocument/2006/relationships" xmlns:p="http://schemas.openxmlformats.org/presentationml/2006/main">
+  <p:cSld name="Slide 14">
+    <p:bg>
+      <p:bgPr>
+        <a:solidFill>
+          <a:srgbClr val="FAF7F2"/>
+        </a:solidFill>
+      </p:bgPr>
+    </p:bg>
+    <p:spTree>
+      <p:nvGrpSpPr>
+        <p:cNvPr id="1" name=""/>
+        <p:cNvGrpSpPr/>
+        <p:nvPr/>
+      </p:nvGrpSpPr>
+      <p:grpSpPr>
+        <a:xfrm>
+          <a:off x="0" y="0"/>
+          <a:ext cx="0" cy="0"/>
+          <a:chOff x="0" y="0"/>
+          <a:chExt cx="0" cy="0"/>
+        </a:xfrm>
+      </p:grpSpPr>
+      <p:sp>
+        <p:nvSpPr>
+          <p:cNvPr id="2" name="Text 0"/>
+          <p:cNvSpPr/>
+          <p:nvPr/>
+        </p:nvSpPr>
+        <p:spPr>
+          <a:xfrm>
+            <a:off x="0" y="0"/>
+            <a:ext cx="9144000" cy="101501"/>
+          </a:xfrm>
+          <a:prstGeom prst="rect">
+            <a:avLst/>
+          </a:prstGeom>
+          <a:solidFill>
+            <a:srgbClr val="5D1D2E"/>
+          </a:solidFill>
+          <a:ln/>
+        </p:spPr>
+        <p:txBody>
+          <a:bodyPr wrap="square" rtlCol="0" anchor="ctr"/>
+          <a:lstStyle/>
+          <a:p>
+            <a:pPr indent="0" marL="0">
+              <a:buNone/>
+            </a:pPr>
+            <a:endParaRPr lang="en-US" dirty="0"/>
+          </a:p>
+        </p:txBody>
+      </p:sp>
+      <p:sp>
+        <p:nvSpPr>
+          <p:cNvPr id="3" name="Text 1"/>
+          <p:cNvSpPr/>
+          <p:nvPr/>
+        </p:nvSpPr>
+        <p:spPr>
+          <a:xfrm>
+            <a:off x="406301" y="457051"/>
+            <a:ext cx="8498026" cy="274290"/>
+          </a:xfrm>
+          <a:prstGeom prst="rect">
+            <a:avLst/>
+          </a:prstGeom>
+          <a:noFill/>
+          <a:ln/>
+        </p:spPr>
+        <p:txBody>
+          <a:bodyPr wrap="square" lIns="0" tIns="0" rIns="0" bIns="0" rtlCol="0" anchor="t"/>
+          <a:lstStyle/>
+          <a:p>
+            <a:pPr algn="l" indent="0" marL="0">
+              <a:lnSpc>
+                <a:spcPts val="2160"/>
+              </a:lnSpc>
+              <a:spcBef>
+                <a:spcPts val="600"/>
+              </a:spcBef>
+              <a:spcAft>
+                <a:spcPts val="800"/>
+              </a:spcAft>
+              <a:buNone/>
+            </a:pPr>
+            <a:r>
+              <a:rPr lang="en-US" sz="1800" b="1" dirty="0">
+                <a:solidFill>
+                  <a:srgbClr val="997929"/>
+                </a:solidFill>
+                <a:latin typeface="Times New Roman" pitchFamily="34" charset="0"/>
+                <a:ea typeface="Times New Roman" pitchFamily="34" charset="-122"/>
+                <a:cs typeface="Times New Roman" pitchFamily="34" charset="-120"/>
+              </a:rPr>
+              <a:t>Teacher notes</a:t>
+            </a:r>
+            <a:endParaRPr lang="en-US" sz="1800" dirty="0"/>
+          </a:p>
+        </p:txBody>
+      </p:sp>
+      <p:sp>
+        <p:nvSpPr>
+          <p:cNvPr id="4" name="Text 2"/>
+          <p:cNvSpPr/>
+          <p:nvPr/>
+        </p:nvSpPr>
+        <p:spPr>
+          <a:xfrm>
+            <a:off x="634901" y="883593"/>
+            <a:ext cx="8102798" cy="731341"/>
+          </a:xfrm>
+          <a:prstGeom prst="rect">
+            <a:avLst/>
+          </a:prstGeom>
+          <a:noFill/>
+          <a:ln/>
+        </p:spPr>
+        <p:txBody>
+          <a:bodyPr wrap="square" lIns="0" tIns="0" rIns="0" bIns="0" rtlCol="0" anchor="t"/>
+          <a:lstStyle/>
+          <a:p>
+            <a:pPr algn="l" marL="342900" indent="-342900">
+              <a:lnSpc>
+                <a:spcPts val="1620"/>
+              </a:lnSpc>
+              <a:spcAft>
+                <a:spcPts val="300"/>
+              </a:spcAft>
+              <a:buSzPct val="100000"/>
+              <a:buChar char="•"/>
+            </a:pPr>
+            <a:r>
+              <a:rPr lang="en-US" sz="1200" dirty="0">
+                <a:solidFill>
+                  <a:srgbClr val="1A1A1A"/>
+                </a:solidFill>
+                <a:latin typeface="Georgia" pitchFamily="34" charset="0"/>
+                <a:ea typeface="Georgia" pitchFamily="34" charset="-122"/>
+                <a:cs typeface="Georgia" pitchFamily="34" charset="-120"/>
+              </a:rPr>
+              <a:t>Most students will start sympathetic to the "Vedic = ancient" claim. That's a starting point, not a fault.</a:t>
+            </a:r>
+            <a:endParaRPr lang="en-US" sz="1200" dirty="0"/>
+          </a:p>
+          <a:p>
+            <a:pPr algn="l" marL="342900" indent="-342900">
+              <a:lnSpc>
+                <a:spcPts val="1620"/>
+              </a:lnSpc>
+              <a:spcAft>
+                <a:spcPts val="300"/>
+              </a:spcAft>
+              <a:buSzPct val="100000"/>
+              <a:buChar char="•"/>
+            </a:pPr>
+            <a:r>
+              <a:rPr lang="en-US" sz="1200" dirty="0">
+                <a:solidFill>
+                  <a:srgbClr val="1A1A1A"/>
+                </a:solidFill>
+                <a:latin typeface="Georgia" pitchFamily="34" charset="0"/>
+                <a:ea typeface="Georgia" pitchFamily="34" charset="-122"/>
+                <a:cs typeface="Georgia" pitchFamily="34" charset="-120"/>
+              </a:rPr>
+              <a:t>Don't decide the question for the class. The point is that they read primary and secondary sources, then form their own position.</a:t>
+            </a:r>
+            <a:endParaRPr lang="en-US" sz="1200" dirty="0"/>
+          </a:p>
+        </p:txBody>
+      </p:sp>
+      <p:sp>
+        <p:nvSpPr>
+          <p:cNvPr id="5" name="Text 3"/>
+          <p:cNvSpPr/>
+          <p:nvPr/>
+        </p:nvSpPr>
+        <p:spPr>
+          <a:xfrm>
+            <a:off x="406301" y="4434929"/>
+            <a:ext cx="8498026" cy="213271"/>
+          </a:xfrm>
+          <a:prstGeom prst="rect">
+            <a:avLst/>
+          </a:prstGeom>
+          <a:noFill/>
+          <a:ln/>
+        </p:spPr>
+        <p:txBody>
+          <a:bodyPr wrap="square" lIns="0" tIns="0" rIns="0" bIns="0" rtlCol="0" anchor="t"/>
+          <a:lstStyle/>
+          <a:p>
+            <a:pPr algn="l" indent="0" marL="0">
+              <a:lnSpc>
+                <a:spcPts val="1680"/>
+              </a:lnSpc>
+              <a:spcBef>
+                <a:spcPts val="300"/>
+              </a:spcBef>
+              <a:spcAft>
+                <a:spcPts val="300"/>
+              </a:spcAft>
+              <a:buNone/>
+            </a:pPr>
+            <a:r>
+              <a:rPr lang="en-US" sz="1200" dirty="0">
+                <a:solidFill>
+                  <a:srgbClr val="1A1A1A"/>
+                </a:solidFill>
+                <a:latin typeface="Georgia" pitchFamily="34" charset="0"/>
+                <a:ea typeface="Georgia" pitchFamily="34" charset="-122"/>
+                <a:cs typeface="Georgia" pitchFamily="34" charset="-120"/>
+              </a:rPr>
+              <a:t>Senior ·  · IKS Curriculum</a:t>
+            </a:r>
+            <a:endParaRPr lang="en-US" sz="1200" dirty="0"/>
+          </a:p>
+        </p:txBody>
+      </p:sp>
+    </p:spTree>
+  </p:cSld>
+  <p:clrMapOvr>
+    <a:masterClrMapping/>
+  </p:clrMapOvr>
+</p:sld>
+</file>
+
+<file path=ppt/slides/slide15.xml><?xml version="1.0" encoding="utf-8"?>
+<p:sld xmlns:a="http://schemas.openxmlformats.org/drawingml/2006/main" xmlns:r="http://schemas.openxmlformats.org/officeDocument/2006/relationships" xmlns:p="http://schemas.openxmlformats.org/presentationml/2006/main">
+  <p:cSld name="Slide 15">
+    <p:bg>
+      <p:bgPr>
+        <a:solidFill>
+          <a:srgbClr val="FAF7F2"/>
+        </a:solidFill>
+      </p:bgPr>
+    </p:bg>
+    <p:spTree>
+      <p:nvGrpSpPr>
+        <p:cNvPr id="1" name=""/>
+        <p:cNvGrpSpPr/>
+        <p:nvPr/>
+      </p:nvGrpSpPr>
+      <p:grpSpPr>
+        <a:xfrm>
+          <a:off x="0" y="0"/>
+          <a:ext cx="0" cy="0"/>
+          <a:chOff x="0" y="0"/>
+          <a:chExt cx="0" cy="0"/>
+        </a:xfrm>
+      </p:grpSpPr>
+      <p:sp>
+        <p:nvSpPr>
+          <p:cNvPr id="2" name="Text 0"/>
+          <p:cNvSpPr/>
+          <p:nvPr/>
+        </p:nvSpPr>
+        <p:spPr>
+          <a:xfrm>
+            <a:off x="0" y="0"/>
+            <a:ext cx="9144000" cy="101501"/>
+          </a:xfrm>
+          <a:prstGeom prst="rect">
+            <a:avLst/>
+          </a:prstGeom>
+          <a:solidFill>
+            <a:srgbClr val="5D1D2E"/>
+          </a:solidFill>
+          <a:ln/>
+        </p:spPr>
+        <p:txBody>
+          <a:bodyPr wrap="square" rtlCol="0" anchor="ctr"/>
+          <a:lstStyle/>
+          <a:p>
+            <a:pPr indent="0" marL="0">
+              <a:buNone/>
+            </a:pPr>
+            <a:endParaRPr lang="en-US" dirty="0"/>
+          </a:p>
+        </p:txBody>
+      </p:sp>
+      <p:sp>
+        <p:nvSpPr>
+          <p:cNvPr id="3" name="Text 1"/>
+          <p:cNvSpPr/>
+          <p:nvPr/>
+        </p:nvSpPr>
+        <p:spPr>
+          <a:xfrm>
+            <a:off x="406301" y="457051"/>
+            <a:ext cx="8498026" cy="274290"/>
+          </a:xfrm>
+          <a:prstGeom prst="rect">
+            <a:avLst/>
+          </a:prstGeom>
+          <a:noFill/>
+          <a:ln/>
+        </p:spPr>
+        <p:txBody>
+          <a:bodyPr wrap="square" lIns="0" tIns="0" rIns="0" bIns="0" rtlCol="0" anchor="t"/>
+          <a:lstStyle/>
+          <a:p>
+            <a:pPr algn="l" indent="0" marL="0">
+              <a:lnSpc>
+                <a:spcPts val="2160"/>
+              </a:lnSpc>
+              <a:spcBef>
+                <a:spcPts val="600"/>
+              </a:spcBef>
+              <a:spcAft>
+                <a:spcPts val="800"/>
+              </a:spcAft>
+              <a:buNone/>
+            </a:pPr>
+            <a:r>
+              <a:rPr lang="en-US" sz="1800" b="1" dirty="0">
+                <a:solidFill>
+                  <a:srgbClr val="997929"/>
+                </a:solidFill>
+                <a:latin typeface="Times New Roman" pitchFamily="34" charset="0"/>
+                <a:ea typeface="Times New Roman" pitchFamily="34" charset="-122"/>
+                <a:cs typeface="Times New Roman" pitchFamily="34" charset="-120"/>
+              </a:rPr>
+              <a:t>Citation(s) used</a:t>
+            </a:r>
+            <a:endParaRPr lang="en-US" sz="1800" dirty="0"/>
+          </a:p>
+        </p:txBody>
+      </p:sp>
+      <p:sp>
+        <p:nvSpPr>
+          <p:cNvPr id="4" name="Text 2"/>
+          <p:cNvSpPr/>
+          <p:nvPr/>
+        </p:nvSpPr>
+        <p:spPr>
+          <a:xfrm>
+            <a:off x="634901" y="883593"/>
+            <a:ext cx="8102798" cy="525661"/>
+          </a:xfrm>
+          <a:prstGeom prst="rect">
+            <a:avLst/>
+          </a:prstGeom>
+          <a:noFill/>
+          <a:ln/>
+        </p:spPr>
+        <p:txBody>
+          <a:bodyPr wrap="square" lIns="0" tIns="0" rIns="0" bIns="0" rtlCol="0" anchor="t"/>
+          <a:lstStyle/>
+          <a:p>
+            <a:pPr algn="l" marL="342900" indent="-342900">
+              <a:lnSpc>
+                <a:spcPts val="1620"/>
+              </a:lnSpc>
+              <a:spcAft>
+                <a:spcPts val="300"/>
+              </a:spcAft>
+              <a:buSzPct val="100000"/>
+              <a:buChar char="•"/>
+            </a:pPr>
+            <a:r>
+              <a:rPr lang="en-US" sz="1200" dirty="0">
+                <a:solidFill>
+                  <a:srgbClr val="1A1A1A"/>
+                </a:solidFill>
+                <a:latin typeface="Georgia" pitchFamily="34" charset="0"/>
+                <a:ea typeface="Georgia" pitchFamily="34" charset="-122"/>
+                <a:cs typeface="Georgia" pitchFamily="34" charset="-120"/>
+              </a:rPr>
+              <a:t>Tirthaji (1965), </a:t>
+            </a:r>
+            <a:pPr algn="l" indent="0" marL="0">
+              <a:lnSpc>
+                <a:spcPts val="1620"/>
+              </a:lnSpc>
+              <a:spcAft>
+                <a:spcPts val="300"/>
+              </a:spcAft>
+              <a:buNone/>
+            </a:pPr>
+            <a:r>
+              <a:rPr lang="en-US" sz="1200" i="1" dirty="0">
+                <a:solidFill>
+                  <a:srgbClr val="1A1A1A"/>
+                </a:solidFill>
+                <a:latin typeface="Georgia" pitchFamily="34" charset="0"/>
+                <a:ea typeface="Georgia" pitchFamily="34" charset="-122"/>
+                <a:cs typeface="Georgia" pitchFamily="34" charset="-120"/>
+              </a:rPr>
+              <a:t>Vedic Mathematics</a:t>
+            </a:r>
+            <a:pPr algn="l" indent="0" marL="0">
+              <a:lnSpc>
+                <a:spcPts val="1620"/>
+              </a:lnSpc>
+              <a:spcAft>
+                <a:spcPts val="300"/>
+              </a:spcAft>
+              <a:buNone/>
+            </a:pPr>
+            <a:r>
+              <a:rPr lang="en-US" sz="1200" dirty="0">
+                <a:solidFill>
+                  <a:srgbClr val="1A1A1A"/>
+                </a:solidFill>
+                <a:latin typeface="Georgia" pitchFamily="34" charset="0"/>
+                <a:ea typeface="Georgia" pitchFamily="34" charset="-122"/>
+                <a:cs typeface="Georgia" pitchFamily="34" charset="-120"/>
+              </a:rPr>
+              <a:t>, Preface.</a:t>
+            </a:r>
+            <a:endParaRPr lang="en-US" sz="1200" dirty="0"/>
+          </a:p>
+          <a:p>
+            <a:pPr algn="l" marL="342900" indent="-342900">
+              <a:lnSpc>
+                <a:spcPts val="1620"/>
+              </a:lnSpc>
+              <a:spcAft>
+                <a:spcPts val="300"/>
+              </a:spcAft>
+              <a:buSzPct val="100000"/>
+              <a:buChar char="•"/>
+            </a:pPr>
+            <a:r>
+              <a:rPr lang="en-US" sz="1200" i="1" dirty="0">
+                <a:solidFill>
+                  <a:srgbClr val="1A1A1A"/>
+                </a:solidFill>
+                <a:latin typeface="Georgia" pitchFamily="34" charset="0"/>
+                <a:ea typeface="Georgia" pitchFamily="34" charset="-122"/>
+                <a:cs typeface="Georgia" pitchFamily="34" charset="-120"/>
+              </a:rPr>
+              <a:t>Microsoft Word - sutras1.pdf</a:t>
+            </a:r>
+            <a:pPr algn="l" indent="0" marL="0">
+              <a:lnSpc>
+                <a:spcPts val="1620"/>
+              </a:lnSpc>
+              <a:spcAft>
+                <a:spcPts val="300"/>
+              </a:spcAft>
+              <a:buNone/>
+            </a:pPr>
+            <a:r>
+              <a:rPr lang="en-US" sz="1200" dirty="0">
+                <a:solidFill>
+                  <a:srgbClr val="1A1A1A"/>
+                </a:solidFill>
+                <a:latin typeface="Georgia" pitchFamily="34" charset="0"/>
+                <a:ea typeface="Georgia" pitchFamily="34" charset="-122"/>
+                <a:cs typeface="Georgia" pitchFamily="34" charset="-120"/>
+              </a:rPr>
               <a:t> — the sūtra list.</a:t>
             </a:r>
             <a:endParaRPr lang="en-US" sz="1200" dirty="0"/>
@@ -2284,7 +4037,7 @@
       </p:sp>
       <p:sp>
         <p:nvSpPr>
-          <p:cNvPr id="6" name="Text 4"/>
+          <p:cNvPr id="5" name="Text 3"/>
           <p:cNvSpPr/>
           <p:nvPr/>
         </p:nvSpPr>
@@ -2434,7 +4187,7 @@
                 <a:ea typeface="Times New Roman" pitchFamily="34" charset="-122"/>
                 <a:cs typeface="Times New Roman" pitchFamily="34" charset="-120"/>
               </a:rPr>
-              <a:t>Materials</a:t>
+              <a:t>Learning objective</a:t>
             </a:r>
             <a:endParaRPr lang="en-US" sz="1800" dirty="0"/>
           </a:p>
@@ -2482,53 +4235,7 @@
                 <a:ea typeface="Georgia" pitchFamily="34" charset="-122"/>
                 <a:cs typeface="Georgia" pitchFamily="34" charset="-120"/>
               </a:rPr>
-              <a:t>– Baseline sheet: a single 5-addend × 5-digit column sum – Stopwatch – Printed extract: Tirthaji's preface to </a:t>
-            </a:r>
-            <a:pPr algn="l" indent="0" marL="0">
-              <a:lnSpc>
-                <a:spcPts val="1680"/>
-              </a:lnSpc>
-              <a:spcBef>
-                <a:spcPts val="300"/>
-              </a:spcBef>
-              <a:spcAft>
-                <a:spcPts val="300"/>
-              </a:spcAft>
-              <a:buNone/>
-            </a:pPr>
-            <a:r>
-              <a:rPr lang="en-US" sz="1200" i="1" dirty="0">
-                <a:solidFill>
-                  <a:srgbClr val="1A1A1A"/>
-                </a:solidFill>
-                <a:latin typeface="Georgia" pitchFamily="34" charset="0"/>
-                <a:ea typeface="Georgia" pitchFamily="34" charset="-122"/>
-                <a:cs typeface="Georgia" pitchFamily="34" charset="-120"/>
-              </a:rPr>
-              <a:t>Vedic Mathematics</a:t>
-            </a:r>
-            <a:pPr algn="l" indent="0" marL="0">
-              <a:lnSpc>
-                <a:spcPts val="1680"/>
-              </a:lnSpc>
-              <a:spcBef>
-                <a:spcPts val="300"/>
-              </a:spcBef>
-              <a:spcAft>
-                <a:spcPts val="300"/>
-              </a:spcAft>
-              <a:buNone/>
-            </a:pPr>
-            <a:r>
-              <a:rPr lang="en-US" sz="1200" dirty="0">
-                <a:solidFill>
-                  <a:srgbClr val="1A1A1A"/>
-                </a:solidFill>
-                <a:latin typeface="Georgia" pitchFamily="34" charset="0"/>
-                <a:ea typeface="Georgia" pitchFamily="34" charset="-122"/>
-                <a:cs typeface="Georgia" pitchFamily="34" charset="-120"/>
-              </a:rPr>
-              <a:t> (1965)</a:t>
+              <a:t>Students record a personal baseline for standard-algorithm column addition AND consider the question: was "Vedic mathematics" actually Vedic?</a:t>
             </a:r>
             <a:endParaRPr lang="en-US" sz="1200" dirty="0"/>
           </a:p>
@@ -2686,7 +4393,7 @@
                 <a:ea typeface="Times New Roman" pitchFamily="34" charset="-122"/>
                 <a:cs typeface="Times New Roman" pitchFamily="34" charset="-120"/>
               </a:rPr>
-              <a:t>Flow</a:t>
+              <a:t>Materials</a:t>
             </a:r>
             <a:endParaRPr lang="en-US" sz="1800" dirty="0"/>
           </a:p>
@@ -2695,6 +4402,140 @@
       <p:sp>
         <p:nvSpPr>
           <p:cNvPr id="4" name="Text 2"/>
+          <p:cNvSpPr/>
+          <p:nvPr/>
+        </p:nvSpPr>
+        <p:spPr>
+          <a:xfrm>
+            <a:off x="634901" y="883593"/>
+            <a:ext cx="8102798" cy="769441"/>
+          </a:xfrm>
+          <a:prstGeom prst="rect">
+            <a:avLst/>
+          </a:prstGeom>
+          <a:noFill/>
+          <a:ln/>
+        </p:spPr>
+        <p:txBody>
+          <a:bodyPr wrap="square" lIns="0" tIns="0" rIns="0" bIns="0" rtlCol="0" anchor="t"/>
+          <a:lstStyle/>
+          <a:p>
+            <a:pPr algn="l" marL="342900" indent="-342900">
+              <a:lnSpc>
+                <a:spcPts val="1620"/>
+              </a:lnSpc>
+              <a:spcAft>
+                <a:spcPts val="300"/>
+              </a:spcAft>
+              <a:buSzPct val="100000"/>
+              <a:buChar char="•"/>
+            </a:pPr>
+            <a:r>
+              <a:rPr lang="en-US" sz="1200" dirty="0">
+                <a:solidFill>
+                  <a:srgbClr val="1A1A1A"/>
+                </a:solidFill>
+                <a:latin typeface="Georgia" pitchFamily="34" charset="0"/>
+                <a:ea typeface="Georgia" pitchFamily="34" charset="-122"/>
+                <a:cs typeface="Georgia" pitchFamily="34" charset="-120"/>
+              </a:rPr>
+              <a:t>Baseline sheet: a single 5-addend × 5-digit column sum</a:t>
+            </a:r>
+            <a:endParaRPr lang="en-US" sz="1200" dirty="0"/>
+          </a:p>
+          <a:p>
+            <a:pPr algn="l" marL="342900" indent="-342900">
+              <a:lnSpc>
+                <a:spcPts val="1620"/>
+              </a:lnSpc>
+              <a:spcAft>
+                <a:spcPts val="300"/>
+              </a:spcAft>
+              <a:buSzPct val="100000"/>
+              <a:buChar char="•"/>
+            </a:pPr>
+            <a:r>
+              <a:rPr lang="en-US" sz="1200" dirty="0">
+                <a:solidFill>
+                  <a:srgbClr val="1A1A1A"/>
+                </a:solidFill>
+                <a:latin typeface="Georgia" pitchFamily="34" charset="0"/>
+                <a:ea typeface="Georgia" pitchFamily="34" charset="-122"/>
+                <a:cs typeface="Georgia" pitchFamily="34" charset="-120"/>
+              </a:rPr>
+              <a:t>Stopwatch</a:t>
+            </a:r>
+            <a:endParaRPr lang="en-US" sz="1200" dirty="0"/>
+          </a:p>
+          <a:p>
+            <a:pPr algn="l" marL="342900" indent="-342900">
+              <a:lnSpc>
+                <a:spcPts val="1620"/>
+              </a:lnSpc>
+              <a:spcAft>
+                <a:spcPts val="300"/>
+              </a:spcAft>
+              <a:buSzPct val="100000"/>
+              <a:buChar char="•"/>
+            </a:pPr>
+            <a:r>
+              <a:rPr lang="en-US" sz="1200" dirty="0">
+                <a:solidFill>
+                  <a:srgbClr val="1A1A1A"/>
+                </a:solidFill>
+                <a:latin typeface="Georgia" pitchFamily="34" charset="0"/>
+                <a:ea typeface="Georgia" pitchFamily="34" charset="-122"/>
+                <a:cs typeface="Georgia" pitchFamily="34" charset="-120"/>
+              </a:rPr>
+              <a:t>Printed extract: Tirthaji's preface to </a:t>
+            </a:r>
+            <a:pPr algn="l" indent="0" marL="0">
+              <a:lnSpc>
+                <a:spcPts val="1620"/>
+              </a:lnSpc>
+              <a:spcAft>
+                <a:spcPts val="300"/>
+              </a:spcAft>
+              <a:buNone/>
+            </a:pPr>
+            <a:r>
+              <a:rPr lang="en-US" sz="1200" i="1" dirty="0">
+                <a:solidFill>
+                  <a:srgbClr val="1A1A1A"/>
+                </a:solidFill>
+                <a:latin typeface="Georgia" pitchFamily="34" charset="0"/>
+                <a:ea typeface="Georgia" pitchFamily="34" charset="-122"/>
+                <a:cs typeface="Georgia" pitchFamily="34" charset="-120"/>
+              </a:rPr>
+              <a:t>Vedic Mathematics</a:t>
+            </a:r>
+            <a:pPr algn="l" indent="0" marL="0">
+              <a:lnSpc>
+                <a:spcPts val="1620"/>
+              </a:lnSpc>
+              <a:spcAft>
+                <a:spcPts val="300"/>
+              </a:spcAft>
+              <a:buNone/>
+            </a:pPr>
+            <a:r>
+              <a:rPr lang="en-US" sz="1200" dirty="0">
+                <a:solidFill>
+                  <a:srgbClr val="1A1A1A"/>
+                </a:solidFill>
+                <a:latin typeface="Georgia" pitchFamily="34" charset="0"/>
+                <a:ea typeface="Georgia" pitchFamily="34" charset="-122"/>
+                <a:cs typeface="Georgia" pitchFamily="34" charset="-120"/>
+              </a:rPr>
+              <a:t> (1965)</a:t>
+            </a:r>
+            <a:endParaRPr lang="en-US" sz="1200" dirty="0"/>
+          </a:p>
+        </p:txBody>
+      </p:sp>
+      <p:sp>
+        <p:nvSpPr>
+          <p:cNvPr id="5" name="Text 3"/>
           <p:cNvSpPr/>
           <p:nvPr/>
         </p:nvSpPr>
@@ -2844,7 +4685,7 @@
                 <a:ea typeface="Times New Roman" pitchFamily="34" charset="-122"/>
                 <a:cs typeface="Times New Roman" pitchFamily="34" charset="-120"/>
               </a:rPr>
-              <a:t>Warm-up (5 min)</a:t>
+              <a:t>Flow</a:t>
             </a:r>
             <a:endParaRPr lang="en-US" sz="1800" dirty="0"/>
           </a:p>
@@ -2853,125 +4694,6 @@
       <p:sp>
         <p:nvSpPr>
           <p:cNvPr id="4" name="Text 2"/>
-          <p:cNvSpPr/>
-          <p:nvPr/>
-        </p:nvSpPr>
-        <p:spPr>
-          <a:xfrm>
-            <a:off x="406301" y="870942"/>
-            <a:ext cx="8498026" cy="213271"/>
-          </a:xfrm>
-          <a:prstGeom prst="rect">
-            <a:avLst/>
-          </a:prstGeom>
-          <a:noFill/>
-          <a:ln/>
-        </p:spPr>
-        <p:txBody>
-          <a:bodyPr wrap="square" lIns="0" tIns="0" rIns="0" bIns="0" rtlCol="0" anchor="t"/>
-          <a:lstStyle/>
-          <a:p>
-            <a:pPr algn="l" indent="0" marL="0">
-              <a:lnSpc>
-                <a:spcPts val="1680"/>
-              </a:lnSpc>
-              <a:spcBef>
-                <a:spcPts val="300"/>
-              </a:spcBef>
-              <a:spcAft>
-                <a:spcPts val="300"/>
-              </a:spcAft>
-              <a:buNone/>
-            </a:pPr>
-            <a:r>
-              <a:rPr lang="en-US" sz="1200" dirty="0">
-                <a:solidFill>
-                  <a:srgbClr val="1A1A1A"/>
-                </a:solidFill>
-                <a:latin typeface="Georgia" pitchFamily="34" charset="0"/>
-                <a:ea typeface="Georgia" pitchFamily="34" charset="-122"/>
-                <a:cs typeface="Georgia" pitchFamily="34" charset="-120"/>
-              </a:rPr>
-              <a:t>Provocation: </a:t>
-            </a:r>
-            <a:pPr algn="l" indent="0" marL="0">
-              <a:lnSpc>
-                <a:spcPts val="1680"/>
-              </a:lnSpc>
-              <a:spcBef>
-                <a:spcPts val="300"/>
-              </a:spcBef>
-              <a:spcAft>
-                <a:spcPts val="300"/>
-              </a:spcAft>
-              <a:buNone/>
-            </a:pPr>
-            <a:r>
-              <a:rPr lang="en-US" sz="1200" i="1" dirty="0">
-                <a:solidFill>
-                  <a:srgbClr val="1A1A1A"/>
-                </a:solidFill>
-                <a:latin typeface="Georgia" pitchFamily="34" charset="0"/>
-                <a:ea typeface="Georgia" pitchFamily="34" charset="-122"/>
-                <a:cs typeface="Georgia" pitchFamily="34" charset="-120"/>
-              </a:rPr>
-              <a:t>"You've all heard of 'Vedic Mathematics.' What does the 'Vedic' part mean?"</a:t>
-            </a:r>
-            <a:endParaRPr lang="en-US" sz="1200" dirty="0"/>
-          </a:p>
-        </p:txBody>
-      </p:sp>
-      <p:sp>
-        <p:nvSpPr>
-          <p:cNvPr id="5" name="Text 3"/>
-          <p:cNvSpPr/>
-          <p:nvPr/>
-        </p:nvSpPr>
-        <p:spPr>
-          <a:xfrm>
-            <a:off x="406301" y="1160413"/>
-            <a:ext cx="8498026" cy="213271"/>
-          </a:xfrm>
-          <a:prstGeom prst="rect">
-            <a:avLst/>
-          </a:prstGeom>
-          <a:noFill/>
-          <a:ln/>
-        </p:spPr>
-        <p:txBody>
-          <a:bodyPr wrap="square" lIns="0" tIns="0" rIns="0" bIns="0" rtlCol="0" anchor="t"/>
-          <a:lstStyle/>
-          <a:p>
-            <a:pPr algn="l" indent="0" marL="0">
-              <a:lnSpc>
-                <a:spcPts val="1680"/>
-              </a:lnSpc>
-              <a:spcBef>
-                <a:spcPts val="300"/>
-              </a:spcBef>
-              <a:spcAft>
-                <a:spcPts val="300"/>
-              </a:spcAft>
-              <a:buNone/>
-            </a:pPr>
-            <a:r>
-              <a:rPr lang="en-US" sz="1200" dirty="0">
-                <a:solidFill>
-                  <a:srgbClr val="1A1A1A"/>
-                </a:solidFill>
-                <a:latin typeface="Georgia" pitchFamily="34" charset="0"/>
-                <a:ea typeface="Georgia" pitchFamily="34" charset="-122"/>
-                <a:cs typeface="Georgia" pitchFamily="34" charset="-120"/>
-              </a:rPr>
-              <a:t>Take 3 student responses. Don't correct. Note variety of views.</a:t>
-            </a:r>
-            <a:endParaRPr lang="en-US" sz="1200" dirty="0"/>
-          </a:p>
-        </p:txBody>
-      </p:sp>
-      <p:sp>
-        <p:nvSpPr>
-          <p:cNvPr id="6" name="Text 4"/>
           <p:cNvSpPr/>
           <p:nvPr/>
         </p:nvSpPr>
@@ -3121,7 +4843,7 @@
                 <a:ea typeface="Times New Roman" pitchFamily="34" charset="-122"/>
                 <a:cs typeface="Times New Roman" pitchFamily="34" charset="-120"/>
               </a:rPr>
-              <a:t>Baseline timing (5 min)</a:t>
+              <a:t>Warm-up (5 min)</a:t>
             </a:r>
             <a:endParaRPr lang="en-US" sz="1800" dirty="0"/>
           </a:p>
@@ -3169,7 +4891,30 @@
                 <a:ea typeface="Georgia" pitchFamily="34" charset="-122"/>
                 <a:cs typeface="Georgia" pitchFamily="34" charset="-120"/>
               </a:rPr>
-              <a:t>– 5-addend × 5-digit sum (e.g. 57283 + 14916 + 62385 + 27548 + 31057). – Solve using your standard method. Record time.</a:t>
+              <a:t>Provocation: </a:t>
+            </a:r>
+            <a:pPr algn="l" indent="0" marL="0">
+              <a:lnSpc>
+                <a:spcPts val="1680"/>
+              </a:lnSpc>
+              <a:spcBef>
+                <a:spcPts val="300"/>
+              </a:spcBef>
+              <a:spcAft>
+                <a:spcPts val="300"/>
+              </a:spcAft>
+              <a:buNone/>
+            </a:pPr>
+            <a:r>
+              <a:rPr lang="en-US" sz="1200" i="1" dirty="0">
+                <a:solidFill>
+                  <a:srgbClr val="1A1A1A"/>
+                </a:solidFill>
+                <a:latin typeface="Georgia" pitchFamily="34" charset="0"/>
+                <a:ea typeface="Georgia" pitchFamily="34" charset="-122"/>
+                <a:cs typeface="Georgia" pitchFamily="34" charset="-120"/>
+              </a:rPr>
+              <a:t>"You've all heard of 'Vedic Mathematics.' What does the 'Vedic' part mean?"</a:t>
             </a:r>
             <a:endParaRPr lang="en-US" sz="1200" dirty="0"/>
           </a:p>
@@ -3178,6 +4923,54 @@
       <p:sp>
         <p:nvSpPr>
           <p:cNvPr id="5" name="Text 3"/>
+          <p:cNvSpPr/>
+          <p:nvPr/>
+        </p:nvSpPr>
+        <p:spPr>
+          <a:xfrm>
+            <a:off x="406301" y="1160413"/>
+            <a:ext cx="8498026" cy="213271"/>
+          </a:xfrm>
+          <a:prstGeom prst="rect">
+            <a:avLst/>
+          </a:prstGeom>
+          <a:noFill/>
+          <a:ln/>
+        </p:spPr>
+        <p:txBody>
+          <a:bodyPr wrap="square" lIns="0" tIns="0" rIns="0" bIns="0" rtlCol="0" anchor="t"/>
+          <a:lstStyle/>
+          <a:p>
+            <a:pPr algn="l" indent="0" marL="0">
+              <a:lnSpc>
+                <a:spcPts val="1680"/>
+              </a:lnSpc>
+              <a:spcBef>
+                <a:spcPts val="300"/>
+              </a:spcBef>
+              <a:spcAft>
+                <a:spcPts val="300"/>
+              </a:spcAft>
+              <a:buNone/>
+            </a:pPr>
+            <a:r>
+              <a:rPr lang="en-US" sz="1200" dirty="0">
+                <a:solidFill>
+                  <a:srgbClr val="1A1A1A"/>
+                </a:solidFill>
+                <a:latin typeface="Georgia" pitchFamily="34" charset="0"/>
+                <a:ea typeface="Georgia" pitchFamily="34" charset="-122"/>
+                <a:cs typeface="Georgia" pitchFamily="34" charset="-120"/>
+              </a:rPr>
+              <a:t>Take 3 student responses. Don't correct. Note variety of views.</a:t>
+            </a:r>
+            <a:endParaRPr lang="en-US" sz="1200" dirty="0"/>
+          </a:p>
+        </p:txBody>
+      </p:sp>
+      <p:sp>
+        <p:nvSpPr>
+          <p:cNvPr id="6" name="Text 4"/>
           <p:cNvSpPr/>
           <p:nvPr/>
         </p:nvSpPr>
@@ -3327,7 +5120,7 @@
                 <a:ea typeface="Times New Roman" pitchFamily="34" charset="-122"/>
                 <a:cs typeface="Times New Roman" pitchFamily="34" charset="-120"/>
               </a:rPr>
-              <a:t>Core (25 min) — The 16 sūtras and the provenance puzzle</a:t>
+              <a:t>Baseline timing (5 min)</a:t>
             </a:r>
             <a:endParaRPr lang="en-US" sz="1800" dirty="0"/>
           </a:p>
@@ -3342,7 +5135,7 @@
         <p:spPr>
           <a:xfrm>
             <a:off x="634901" y="883593"/>
-            <a:ext cx="8102798" cy="281880"/>
+            <a:ext cx="8102798" cy="525661"/>
           </a:xfrm>
           <a:prstGeom prst="rect">
             <a:avLst/>
@@ -3365,7 +5158,7 @@
               <a:buChar char="•"/>
             </a:pPr>
             <a:r>
-              <a:rPr lang="en-US" sz="1200" b="1" dirty="0">
+              <a:rPr lang="en-US" sz="1200" dirty="0">
                 <a:solidFill>
                   <a:srgbClr val="1A1A1A"/>
                 </a:solidFill>
@@ -3373,16 +5166,20 @@
                 <a:ea typeface="Georgia" pitchFamily="34" charset="-122"/>
                 <a:cs typeface="Georgia" pitchFamily="34" charset="-120"/>
               </a:rPr>
-              <a:t>The 16 sūtras</a:t>
-            </a:r>
-            <a:pPr algn="l" indent="0" marL="0">
+              <a:t>5-addend × 5-digit sum (e.g. 57283 + 14916 + 62385 + 27548 + 31057).</a:t>
+            </a:r>
+            <a:endParaRPr lang="en-US" sz="1200" dirty="0"/>
+          </a:p>
+          <a:p>
+            <a:pPr algn="l" marL="342900" indent="-342900">
               <a:lnSpc>
                 <a:spcPts val="1620"/>
               </a:lnSpc>
               <a:spcAft>
                 <a:spcPts val="300"/>
               </a:spcAft>
-              <a:buNone/>
+              <a:buSzPct val="100000"/>
+              <a:buChar char="•"/>
             </a:pPr>
             <a:r>
               <a:rPr lang="en-US" sz="1200" dirty="0">
@@ -3393,7 +5190,7 @@
                 <a:ea typeface="Georgia" pitchFamily="34" charset="-122"/>
                 <a:cs typeface="Georgia" pitchFamily="34" charset="-120"/>
               </a:rPr>
-              <a:t> (write on board, abbreviated):</a:t>
+              <a:t>Solve using your standard method. Record time.</a:t>
             </a:r>
             <a:endParaRPr lang="en-US" sz="1200" dirty="0"/>
           </a:p>
@@ -3407,990 +5204,7 @@
         </p:nvSpPr>
         <p:spPr>
           <a:xfrm>
-            <a:off x="406301" y="1266974"/>
-            <a:ext cx="8331398" cy="1825079"/>
-          </a:xfrm>
-          <a:prstGeom prst="rect">
-            <a:avLst/>
-          </a:prstGeom>
-          <a:solidFill>
-            <a:srgbClr val="FFFFFF"/>
-          </a:solidFill>
-          <a:ln/>
-        </p:spPr>
-        <p:txBody>
-          <a:bodyPr wrap="square" rtlCol="0" anchor="ctr"/>
-          <a:lstStyle/>
-          <a:p>
-            <a:pPr indent="0" marL="0">
-              <a:buNone/>
-            </a:pPr>
-            <a:endParaRPr lang="en-US" dirty="0"/>
-          </a:p>
-        </p:txBody>
-      </p:sp>
-      <p:sp>
-        <p:nvSpPr>
-          <p:cNvPr id="6" name="Shape 4"/>
-          <p:cNvSpPr/>
-          <p:nvPr/>
-        </p:nvSpPr>
-        <p:spPr>
-          <a:xfrm>
-            <a:off x="430113" y="1266974"/>
-            <a:ext cx="0" cy="1825079"/>
-          </a:xfrm>
-          <a:prstGeom prst="line">
-            <a:avLst/>
-          </a:prstGeom>
-          <a:noFill/>
-          <a:ln w="47625">
-            <a:solidFill>
-              <a:srgbClr val="5D1D2E"/>
-            </a:solidFill>
-            <a:prstDash val="solid"/>
-          </a:ln>
-        </p:spPr>
-      </p:sp>
-      <p:sp>
-        <p:nvSpPr>
-          <p:cNvPr id="7" name="Text 5"/>
-          <p:cNvSpPr/>
-          <p:nvPr/>
-        </p:nvSpPr>
-        <p:spPr>
-          <a:xfrm>
-            <a:off x="631627" y="1393924"/>
-            <a:ext cx="8086939" cy="174575"/>
-          </a:xfrm>
-          <a:prstGeom prst="rect">
-            <a:avLst/>
-          </a:prstGeom>
-          <a:noFill/>
-          <a:ln/>
-        </p:spPr>
-        <p:txBody>
-          <a:bodyPr wrap="square" lIns="0" tIns="0" rIns="0" bIns="0" rtlCol="0" anchor="t"/>
-          <a:lstStyle/>
-          <a:p>
-            <a:pPr algn="l" indent="0" marL="0">
-              <a:lnSpc>
-                <a:spcPts val="1375"/>
-              </a:lnSpc>
-              <a:buNone/>
-            </a:pPr>
-            <a:r>
-              <a:rPr lang="en-US" sz="1100" dirty="0">
-                <a:solidFill>
-                  <a:srgbClr val="1A1A1A"/>
-                </a:solidFill>
-                <a:latin typeface="Courier New" pitchFamily="34" charset="0"/>
-                <a:ea typeface="Courier New" pitchFamily="34" charset="-122"/>
-                <a:cs typeface="Courier New" pitchFamily="34" charset="-120"/>
-              </a:rPr>
-              <a:t>1. Ekādhikena Pūrveṇa     2. Nikhilam Navataścaramaṁ Daśataḥ</a:t>
-            </a:r>
-            <a:endParaRPr lang="en-US" sz="1100" dirty="0"/>
-          </a:p>
-        </p:txBody>
-      </p:sp>
-      <p:sp>
-        <p:nvSpPr>
-          <p:cNvPr id="8" name="Text 6"/>
-          <p:cNvSpPr/>
-          <p:nvPr/>
-        </p:nvSpPr>
-        <p:spPr>
-          <a:xfrm>
-            <a:off x="631627" y="1568500"/>
-            <a:ext cx="8086939" cy="174575"/>
-          </a:xfrm>
-          <a:prstGeom prst="rect">
-            <a:avLst/>
-          </a:prstGeom>
-          <a:noFill/>
-          <a:ln/>
-        </p:spPr>
-        <p:txBody>
-          <a:bodyPr wrap="square" lIns="0" tIns="0" rIns="0" bIns="0" rtlCol="0" anchor="t"/>
-          <a:lstStyle/>
-          <a:p>
-            <a:pPr algn="l" indent="0" marL="0">
-              <a:lnSpc>
-                <a:spcPts val="1375"/>
-              </a:lnSpc>
-              <a:buNone/>
-            </a:pPr>
-            <a:r>
-              <a:rPr lang="en-US" sz="1100" dirty="0">
-                <a:solidFill>
-                  <a:srgbClr val="1A1A1A"/>
-                </a:solidFill>
-                <a:latin typeface="Courier New" pitchFamily="34" charset="0"/>
-                <a:ea typeface="Courier New" pitchFamily="34" charset="-122"/>
-                <a:cs typeface="Courier New" pitchFamily="34" charset="-120"/>
-              </a:rPr>
-              <a:t>3. Ūrdhva-Tiryagbhyāṁ     4. Parāvartya Yojayet</a:t>
-            </a:r>
-            <a:endParaRPr lang="en-US" sz="1100" dirty="0"/>
-          </a:p>
-        </p:txBody>
-      </p:sp>
-      <p:sp>
-        <p:nvSpPr>
-          <p:cNvPr id="9" name="Text 7"/>
-          <p:cNvSpPr/>
-          <p:nvPr/>
-        </p:nvSpPr>
-        <p:spPr>
-          <a:xfrm>
-            <a:off x="631627" y="1743075"/>
-            <a:ext cx="8086939" cy="174575"/>
-          </a:xfrm>
-          <a:prstGeom prst="rect">
-            <a:avLst/>
-          </a:prstGeom>
-          <a:noFill/>
-          <a:ln/>
-        </p:spPr>
-        <p:txBody>
-          <a:bodyPr wrap="square" lIns="0" tIns="0" rIns="0" bIns="0" rtlCol="0" anchor="t"/>
-          <a:lstStyle/>
-          <a:p>
-            <a:pPr algn="l" indent="0" marL="0">
-              <a:lnSpc>
-                <a:spcPts val="1375"/>
-              </a:lnSpc>
-              <a:buNone/>
-            </a:pPr>
-            <a:r>
-              <a:rPr lang="en-US" sz="1100" dirty="0">
-                <a:solidFill>
-                  <a:srgbClr val="1A1A1A"/>
-                </a:solidFill>
-                <a:latin typeface="Courier New" pitchFamily="34" charset="0"/>
-                <a:ea typeface="Courier New" pitchFamily="34" charset="-122"/>
-                <a:cs typeface="Courier New" pitchFamily="34" charset="-120"/>
-              </a:rPr>
-              <a:t>5. Śūnyaṁ Sāmyasamuccaye  6. (Ānurūpye) Śūnyam Anyat</a:t>
-            </a:r>
-            <a:endParaRPr lang="en-US" sz="1100" dirty="0"/>
-          </a:p>
-        </p:txBody>
-      </p:sp>
-      <p:sp>
-        <p:nvSpPr>
-          <p:cNvPr id="10" name="Text 8"/>
-          <p:cNvSpPr/>
-          <p:nvPr/>
-        </p:nvSpPr>
-        <p:spPr>
-          <a:xfrm>
-            <a:off x="631627" y="1917650"/>
-            <a:ext cx="8086939" cy="174575"/>
-          </a:xfrm>
-          <a:prstGeom prst="rect">
-            <a:avLst/>
-          </a:prstGeom>
-          <a:noFill/>
-          <a:ln/>
-        </p:spPr>
-        <p:txBody>
-          <a:bodyPr wrap="square" lIns="0" tIns="0" rIns="0" bIns="0" rtlCol="0" anchor="t"/>
-          <a:lstStyle/>
-          <a:p>
-            <a:pPr algn="l" indent="0" marL="0">
-              <a:lnSpc>
-                <a:spcPts val="1375"/>
-              </a:lnSpc>
-              <a:buNone/>
-            </a:pPr>
-            <a:r>
-              <a:rPr lang="en-US" sz="1100" dirty="0">
-                <a:solidFill>
-                  <a:srgbClr val="1A1A1A"/>
-                </a:solidFill>
-                <a:latin typeface="Courier New" pitchFamily="34" charset="0"/>
-                <a:ea typeface="Courier New" pitchFamily="34" charset="-122"/>
-                <a:cs typeface="Courier New" pitchFamily="34" charset="-120"/>
-              </a:rPr>
-              <a:t>7. Sankalana Vyavakalanābhyām (← we'll meet this one)</a:t>
-            </a:r>
-            <a:endParaRPr lang="en-US" sz="1100" dirty="0"/>
-          </a:p>
-        </p:txBody>
-      </p:sp>
-      <p:sp>
-        <p:nvSpPr>
-          <p:cNvPr id="11" name="Text 9"/>
-          <p:cNvSpPr/>
-          <p:nvPr/>
-        </p:nvSpPr>
-        <p:spPr>
-          <a:xfrm>
-            <a:off x="631627" y="2092226"/>
-            <a:ext cx="8086939" cy="174575"/>
-          </a:xfrm>
-          <a:prstGeom prst="rect">
-            <a:avLst/>
-          </a:prstGeom>
-          <a:noFill/>
-          <a:ln/>
-        </p:spPr>
-        <p:txBody>
-          <a:bodyPr wrap="square" lIns="0" tIns="0" rIns="0" bIns="0" rtlCol="0" anchor="t"/>
-          <a:lstStyle/>
-          <a:p>
-            <a:pPr algn="l" indent="0" marL="0">
-              <a:lnSpc>
-                <a:spcPts val="1375"/>
-              </a:lnSpc>
-              <a:buNone/>
-            </a:pPr>
-            <a:r>
-              <a:rPr lang="en-US" sz="1100" dirty="0">
-                <a:solidFill>
-                  <a:srgbClr val="1A1A1A"/>
-                </a:solidFill>
-                <a:latin typeface="Courier New" pitchFamily="34" charset="0"/>
-                <a:ea typeface="Courier New" pitchFamily="34" charset="-122"/>
-                <a:cs typeface="Courier New" pitchFamily="34" charset="-120"/>
-              </a:rPr>
-              <a:t>8. Pūraṇāpūraṇābhyām (← and this one)</a:t>
-            </a:r>
-            <a:endParaRPr lang="en-US" sz="1100" dirty="0"/>
-          </a:p>
-        </p:txBody>
-      </p:sp>
-      <p:sp>
-        <p:nvSpPr>
-          <p:cNvPr id="12" name="Text 10"/>
-          <p:cNvSpPr/>
-          <p:nvPr/>
-        </p:nvSpPr>
-        <p:spPr>
-          <a:xfrm>
-            <a:off x="631627" y="2266801"/>
-            <a:ext cx="8086939" cy="174575"/>
-          </a:xfrm>
-          <a:prstGeom prst="rect">
-            <a:avLst/>
-          </a:prstGeom>
-          <a:noFill/>
-          <a:ln/>
-        </p:spPr>
-        <p:txBody>
-          <a:bodyPr wrap="square" lIns="0" tIns="0" rIns="0" bIns="0" rtlCol="0" anchor="t"/>
-          <a:lstStyle/>
-          <a:p>
-            <a:pPr algn="l" indent="0" marL="0">
-              <a:lnSpc>
-                <a:spcPts val="1375"/>
-              </a:lnSpc>
-              <a:buNone/>
-            </a:pPr>
-            <a:r>
-              <a:rPr lang="en-US" sz="1100" dirty="0">
-                <a:solidFill>
-                  <a:srgbClr val="1A1A1A"/>
-                </a:solidFill>
-                <a:latin typeface="Courier New" pitchFamily="34" charset="0"/>
-                <a:ea typeface="Courier New" pitchFamily="34" charset="-122"/>
-                <a:cs typeface="Courier New" pitchFamily="34" charset="-120"/>
-              </a:rPr>
-              <a:t>9. Calana-Kalanābhyām     10. Yāvadūnam</a:t>
-            </a:r>
-            <a:endParaRPr lang="en-US" sz="1100" dirty="0"/>
-          </a:p>
-        </p:txBody>
-      </p:sp>
-      <p:sp>
-        <p:nvSpPr>
-          <p:cNvPr id="13" name="Text 11"/>
-          <p:cNvSpPr/>
-          <p:nvPr/>
-        </p:nvSpPr>
-        <p:spPr>
-          <a:xfrm>
-            <a:off x="631627" y="2441377"/>
-            <a:ext cx="8086939" cy="174575"/>
-          </a:xfrm>
-          <a:prstGeom prst="rect">
-            <a:avLst/>
-          </a:prstGeom>
-          <a:noFill/>
-          <a:ln/>
-        </p:spPr>
-        <p:txBody>
-          <a:bodyPr wrap="square" lIns="0" tIns="0" rIns="0" bIns="0" rtlCol="0" anchor="t"/>
-          <a:lstStyle/>
-          <a:p>
-            <a:pPr algn="l" indent="0" marL="0">
-              <a:lnSpc>
-                <a:spcPts val="1375"/>
-              </a:lnSpc>
-              <a:buNone/>
-            </a:pPr>
-            <a:r>
-              <a:rPr lang="en-US" sz="1100" dirty="0">
-                <a:solidFill>
-                  <a:srgbClr val="1A1A1A"/>
-                </a:solidFill>
-                <a:latin typeface="Courier New" pitchFamily="34" charset="0"/>
-                <a:ea typeface="Courier New" pitchFamily="34" charset="-122"/>
-                <a:cs typeface="Courier New" pitchFamily="34" charset="-120"/>
-              </a:rPr>
-              <a:t>11. Vyaṣṭi-Samaṣṭiḥ        12. Śeṣānyaṅkena Caramena</a:t>
-            </a:r>
-            <a:endParaRPr lang="en-US" sz="1100" dirty="0"/>
-          </a:p>
-        </p:txBody>
-      </p:sp>
-      <p:sp>
-        <p:nvSpPr>
-          <p:cNvPr id="14" name="Text 12"/>
-          <p:cNvSpPr/>
-          <p:nvPr/>
-        </p:nvSpPr>
-        <p:spPr>
-          <a:xfrm>
-            <a:off x="631627" y="2615952"/>
-            <a:ext cx="8086939" cy="174575"/>
-          </a:xfrm>
-          <a:prstGeom prst="rect">
-            <a:avLst/>
-          </a:prstGeom>
-          <a:noFill/>
-          <a:ln/>
-        </p:spPr>
-        <p:txBody>
-          <a:bodyPr wrap="square" lIns="0" tIns="0" rIns="0" bIns="0" rtlCol="0" anchor="t"/>
-          <a:lstStyle/>
-          <a:p>
-            <a:pPr algn="l" indent="0" marL="0">
-              <a:lnSpc>
-                <a:spcPts val="1375"/>
-              </a:lnSpc>
-              <a:buNone/>
-            </a:pPr>
-            <a:r>
-              <a:rPr lang="en-US" sz="1100" dirty="0">
-                <a:solidFill>
-                  <a:srgbClr val="1A1A1A"/>
-                </a:solidFill>
-                <a:latin typeface="Courier New" pitchFamily="34" charset="0"/>
-                <a:ea typeface="Courier New" pitchFamily="34" charset="-122"/>
-                <a:cs typeface="Courier New" pitchFamily="34" charset="-120"/>
-              </a:rPr>
-              <a:t>13. Sopāntya-dvayam Antyam 14. Ekanyūnena Pūrveṇa</a:t>
-            </a:r>
-            <a:endParaRPr lang="en-US" sz="1100" dirty="0"/>
-          </a:p>
-        </p:txBody>
-      </p:sp>
-      <p:sp>
-        <p:nvSpPr>
-          <p:cNvPr id="15" name="Text 13"/>
-          <p:cNvSpPr/>
-          <p:nvPr/>
-        </p:nvSpPr>
-        <p:spPr>
-          <a:xfrm>
-            <a:off x="631627" y="2790527"/>
-            <a:ext cx="8086939" cy="174575"/>
-          </a:xfrm>
-          <a:prstGeom prst="rect">
-            <a:avLst/>
-          </a:prstGeom>
-          <a:noFill/>
-          <a:ln/>
-        </p:spPr>
-        <p:txBody>
-          <a:bodyPr wrap="square" lIns="0" tIns="0" rIns="0" bIns="0" rtlCol="0" anchor="t"/>
-          <a:lstStyle/>
-          <a:p>
-            <a:pPr algn="l" indent="0" marL="0">
-              <a:lnSpc>
-                <a:spcPts val="1375"/>
-              </a:lnSpc>
-              <a:buNone/>
-            </a:pPr>
-            <a:r>
-              <a:rPr lang="en-US" sz="1100" dirty="0">
-                <a:solidFill>
-                  <a:srgbClr val="1A1A1A"/>
-                </a:solidFill>
-                <a:latin typeface="Courier New" pitchFamily="34" charset="0"/>
-                <a:ea typeface="Courier New" pitchFamily="34" charset="-122"/>
-                <a:cs typeface="Courier New" pitchFamily="34" charset="-120"/>
-              </a:rPr>
-              <a:t>15. Guṇitasamuccayaḥ      16. Guṇaka Samuccayaḥ</a:t>
-            </a:r>
-            <a:endParaRPr lang="en-US" sz="1100" dirty="0"/>
-          </a:p>
-        </p:txBody>
-      </p:sp>
-      <p:sp>
-        <p:nvSpPr>
-          <p:cNvPr id="16" name="Text 14"/>
-          <p:cNvSpPr/>
-          <p:nvPr/>
-        </p:nvSpPr>
-        <p:spPr>
-          <a:xfrm>
-            <a:off x="634901" y="3193554"/>
-            <a:ext cx="8102798" cy="281880"/>
-          </a:xfrm>
-          <a:prstGeom prst="rect">
-            <a:avLst/>
-          </a:prstGeom>
-          <a:noFill/>
-          <a:ln/>
-        </p:spPr>
-        <p:txBody>
-          <a:bodyPr wrap="square" lIns="0" tIns="0" rIns="0" bIns="0" rtlCol="0" anchor="t"/>
-          <a:lstStyle/>
-          <a:p>
-            <a:pPr algn="l" marL="342900" indent="-342900">
-              <a:lnSpc>
-                <a:spcPts val="1620"/>
-              </a:lnSpc>
-              <a:spcAft>
-                <a:spcPts val="300"/>
-              </a:spcAft>
-              <a:buSzPct val="100000"/>
-              <a:buChar char="•"/>
-            </a:pPr>
-            <a:r>
-              <a:rPr lang="en-US" sz="1200" b="1" dirty="0">
-                <a:solidFill>
-                  <a:srgbClr val="1A1A1A"/>
-                </a:solidFill>
-                <a:latin typeface="Georgia" pitchFamily="34" charset="0"/>
-                <a:ea typeface="Georgia" pitchFamily="34" charset="-122"/>
-                <a:cs typeface="Georgia" pitchFamily="34" charset="-120"/>
-              </a:rPr>
-              <a:t>Tirthaji's claim.</a:t>
-            </a:r>
-            <a:pPr algn="l" indent="0" marL="0">
-              <a:lnSpc>
-                <a:spcPts val="1620"/>
-              </a:lnSpc>
-              <a:spcAft>
-                <a:spcPts val="300"/>
-              </a:spcAft>
-              <a:buNone/>
-            </a:pPr>
-            <a:r>
-              <a:rPr lang="en-US" sz="1200" dirty="0">
-                <a:solidFill>
-                  <a:srgbClr val="1A1A1A"/>
-                </a:solidFill>
-                <a:latin typeface="Georgia" pitchFamily="34" charset="0"/>
-                <a:ea typeface="Georgia" pitchFamily="34" charset="-122"/>
-                <a:cs typeface="Georgia" pitchFamily="34" charset="-120"/>
-              </a:rPr>
-              <a:t> Read aloud the relevant sentence from Tirthaji's preface (in handout):</a:t>
-            </a:r>
-            <a:endParaRPr lang="en-US" sz="1200" dirty="0"/>
-          </a:p>
-        </p:txBody>
-      </p:sp>
-      <p:sp>
-        <p:nvSpPr>
-          <p:cNvPr id="17" name="Text 15"/>
-          <p:cNvSpPr/>
-          <p:nvPr/>
-        </p:nvSpPr>
-        <p:spPr>
-          <a:xfrm>
-            <a:off x="406301" y="3564285"/>
-            <a:ext cx="8498026" cy="213271"/>
-          </a:xfrm>
-          <a:prstGeom prst="rect">
-            <a:avLst/>
-          </a:prstGeom>
-          <a:noFill/>
-          <a:ln/>
-        </p:spPr>
-        <p:txBody>
-          <a:bodyPr wrap="square" lIns="0" tIns="0" rIns="0" bIns="0" rtlCol="0" anchor="t"/>
-          <a:lstStyle/>
-          <a:p>
-            <a:pPr algn="l" indent="0" marL="0">
-              <a:lnSpc>
-                <a:spcPts val="1680"/>
-              </a:lnSpc>
-              <a:spcBef>
-                <a:spcPts val="300"/>
-              </a:spcBef>
-              <a:spcAft>
-                <a:spcPts val="300"/>
-              </a:spcAft>
-              <a:buNone/>
-            </a:pPr>
-            <a:r>
-              <a:rPr lang="en-US" sz="1200" dirty="0">
-                <a:solidFill>
-                  <a:srgbClr val="1A1A1A"/>
-                </a:solidFill>
-                <a:latin typeface="Georgia" pitchFamily="34" charset="0"/>
-                <a:ea typeface="Georgia" pitchFamily="34" charset="-122"/>
-                <a:cs typeface="Georgia" pitchFamily="34" charset="-120"/>
-              </a:rPr>
-              <a:t>&gt; "The sūtras (aphorisms) of </a:t>
-            </a:r>
-            <a:pPr algn="l" indent="0" marL="0">
-              <a:lnSpc>
-                <a:spcPts val="1680"/>
-              </a:lnSpc>
-              <a:spcBef>
-                <a:spcPts val="300"/>
-              </a:spcBef>
-              <a:spcAft>
-                <a:spcPts val="300"/>
-              </a:spcAft>
-              <a:buNone/>
-            </a:pPr>
-            <a:r>
-              <a:rPr lang="en-US" sz="1200" i="1" dirty="0">
-                <a:solidFill>
-                  <a:srgbClr val="1A1A1A"/>
-                </a:solidFill>
-                <a:latin typeface="Georgia" pitchFamily="34" charset="0"/>
-                <a:ea typeface="Georgia" pitchFamily="34" charset="-122"/>
-                <a:cs typeface="Georgia" pitchFamily="34" charset="-120"/>
-              </a:rPr>
-              <a:t>Atharva-veda Pariśiṣṭa</a:t>
-            </a:r>
-            <a:pPr algn="l" indent="0" marL="0">
-              <a:lnSpc>
-                <a:spcPts val="1680"/>
-              </a:lnSpc>
-              <a:spcBef>
-                <a:spcPts val="300"/>
-              </a:spcBef>
-              <a:spcAft>
-                <a:spcPts val="300"/>
-              </a:spcAft>
-              <a:buNone/>
-            </a:pPr>
-            <a:r>
-              <a:rPr lang="en-US" sz="1200" dirty="0">
-                <a:solidFill>
-                  <a:srgbClr val="1A1A1A"/>
-                </a:solidFill>
-                <a:latin typeface="Georgia" pitchFamily="34" charset="0"/>
-                <a:ea typeface="Georgia" pitchFamily="34" charset="-122"/>
-                <a:cs typeface="Georgia" pitchFamily="34" charset="-120"/>
-              </a:rPr>
-              <a:t> are an integral part of the Vedas..."</a:t>
-            </a:r>
-            <a:endParaRPr lang="en-US" sz="1200" dirty="0"/>
-          </a:p>
-        </p:txBody>
-      </p:sp>
-      <p:sp>
-        <p:nvSpPr>
-          <p:cNvPr id="18" name="Text 16"/>
-          <p:cNvSpPr/>
-          <p:nvPr/>
-        </p:nvSpPr>
-        <p:spPr>
-          <a:xfrm>
-            <a:off x="406301" y="3853755"/>
-            <a:ext cx="8498026" cy="213271"/>
-          </a:xfrm>
-          <a:prstGeom prst="rect">
-            <a:avLst/>
-          </a:prstGeom>
-          <a:noFill/>
-          <a:ln/>
-        </p:spPr>
-        <p:txBody>
-          <a:bodyPr wrap="square" lIns="0" tIns="0" rIns="0" bIns="0" rtlCol="0" anchor="t"/>
-          <a:lstStyle/>
-          <a:p>
-            <a:pPr algn="l" indent="0" marL="0">
-              <a:lnSpc>
-                <a:spcPts val="1680"/>
-              </a:lnSpc>
-              <a:spcBef>
-                <a:spcPts val="300"/>
-              </a:spcBef>
-              <a:spcAft>
-                <a:spcPts val="300"/>
-              </a:spcAft>
-              <a:buNone/>
-            </a:pPr>
-            <a:r>
-              <a:rPr lang="en-US" sz="1200" i="1" dirty="0">
-                <a:solidFill>
-                  <a:srgbClr val="1A1A1A"/>
-                </a:solidFill>
-                <a:latin typeface="Georgia" pitchFamily="34" charset="0"/>
-                <a:ea typeface="Georgia" pitchFamily="34" charset="-122"/>
-                <a:cs typeface="Georgia" pitchFamily="34" charset="-120"/>
-              </a:rPr>
-              <a:t>(Tirthaji claims these 16 sūtras come from a Vedic appendix-text called the</a:t>
-            </a:r>
-            <a:pPr algn="l" indent="0" marL="0">
-              <a:lnSpc>
-                <a:spcPts val="1680"/>
-              </a:lnSpc>
-              <a:spcBef>
-                <a:spcPts val="300"/>
-              </a:spcBef>
-              <a:spcAft>
-                <a:spcPts val="300"/>
-              </a:spcAft>
-              <a:buNone/>
-            </a:pPr>
-            <a:r>
-              <a:rPr lang="en-US" sz="1200" dirty="0">
-                <a:solidFill>
-                  <a:srgbClr val="1A1A1A"/>
-                </a:solidFill>
-                <a:latin typeface="Georgia" pitchFamily="34" charset="0"/>
-                <a:ea typeface="Georgia" pitchFamily="34" charset="-122"/>
-                <a:cs typeface="Georgia" pitchFamily="34" charset="-120"/>
-              </a:rPr>
-              <a:t> Atharva-veda Pariśiṣṭa</a:t>
-            </a:r>
-            <a:pPr algn="l" indent="0" marL="0">
-              <a:lnSpc>
-                <a:spcPts val="1680"/>
-              </a:lnSpc>
-              <a:spcBef>
-                <a:spcPts val="300"/>
-              </a:spcBef>
-              <a:spcAft>
-                <a:spcPts val="300"/>
-              </a:spcAft>
-              <a:buNone/>
-            </a:pPr>
-            <a:r>
-              <a:rPr lang="en-US" sz="1200" i="1" dirty="0">
-                <a:solidFill>
-                  <a:srgbClr val="1A1A1A"/>
-                </a:solidFill>
-                <a:latin typeface="Georgia" pitchFamily="34" charset="0"/>
-                <a:ea typeface="Georgia" pitchFamily="34" charset="-122"/>
-                <a:cs typeface="Georgia" pitchFamily="34" charset="-120"/>
-              </a:rPr>
-              <a:t>.)</a:t>
-            </a:r>
-            <a:endParaRPr lang="en-US" sz="1200" dirty="0"/>
-          </a:p>
-        </p:txBody>
-      </p:sp>
-      <p:sp>
-        <p:nvSpPr>
-          <p:cNvPr id="19" name="Text 17"/>
-          <p:cNvSpPr/>
-          <p:nvPr/>
-        </p:nvSpPr>
-        <p:spPr>
-          <a:xfrm>
-            <a:off x="634901" y="4155877"/>
-            <a:ext cx="8102798" cy="487561"/>
-          </a:xfrm>
-          <a:prstGeom prst="rect">
-            <a:avLst/>
-          </a:prstGeom>
-          <a:noFill/>
-          <a:ln/>
-        </p:spPr>
-        <p:txBody>
-          <a:bodyPr wrap="square" lIns="0" tIns="0" rIns="0" bIns="0" rtlCol="0" anchor="t"/>
-          <a:lstStyle/>
-          <a:p>
-            <a:pPr algn="l" marL="342900" indent="-342900">
-              <a:lnSpc>
-                <a:spcPts val="1620"/>
-              </a:lnSpc>
-              <a:spcAft>
-                <a:spcPts val="300"/>
-              </a:spcAft>
-              <a:buSzPct val="100000"/>
-              <a:buChar char="•"/>
-            </a:pPr>
-            <a:r>
-              <a:rPr lang="en-US" sz="1200" b="1" dirty="0">
-                <a:solidFill>
-                  <a:srgbClr val="1A1A1A"/>
-                </a:solidFill>
-                <a:latin typeface="Georgia" pitchFamily="34" charset="0"/>
-                <a:ea typeface="Georgia" pitchFamily="34" charset="-122"/>
-                <a:cs typeface="Georgia" pitchFamily="34" charset="-120"/>
-              </a:rPr>
-              <a:t>The puzzle:</a:t>
-            </a:r>
-            <a:pPr algn="l" indent="0" marL="0">
-              <a:lnSpc>
-                <a:spcPts val="1620"/>
-              </a:lnSpc>
-              <a:spcAft>
-                <a:spcPts val="300"/>
-              </a:spcAft>
-              <a:buNone/>
-            </a:pPr>
-            <a:r>
-              <a:rPr lang="en-US" sz="1200" dirty="0">
-                <a:solidFill>
-                  <a:srgbClr val="1A1A1A"/>
-                </a:solidFill>
-                <a:latin typeface="Georgia" pitchFamily="34" charset="0"/>
-                <a:ea typeface="Georgia" pitchFamily="34" charset="-122"/>
-                <a:cs typeface="Georgia" pitchFamily="34" charset="-120"/>
-              </a:rPr>
-              <a:t> No other Sanskritist has ever produced the manuscript of this </a:t>
-            </a:r>
-            <a:pPr algn="l" indent="0" marL="0">
-              <a:lnSpc>
-                <a:spcPts val="1620"/>
-              </a:lnSpc>
-              <a:spcAft>
-                <a:spcPts val="300"/>
-              </a:spcAft>
-              <a:buNone/>
-            </a:pPr>
-            <a:r>
-              <a:rPr lang="en-US" sz="1200" i="1" dirty="0">
-                <a:solidFill>
-                  <a:srgbClr val="1A1A1A"/>
-                </a:solidFill>
-                <a:latin typeface="Georgia" pitchFamily="34" charset="0"/>
-                <a:ea typeface="Georgia" pitchFamily="34" charset="-122"/>
-                <a:cs typeface="Georgia" pitchFamily="34" charset="-120"/>
-              </a:rPr>
-              <a:t>Pariśiṣṭa</a:t>
-            </a:r>
-            <a:pPr algn="l" indent="0" marL="0">
-              <a:lnSpc>
-                <a:spcPts val="1620"/>
-              </a:lnSpc>
-              <a:spcAft>
-                <a:spcPts val="300"/>
-              </a:spcAft>
-              <a:buNone/>
-            </a:pPr>
-            <a:r>
-              <a:rPr lang="en-US" sz="1200" dirty="0">
-                <a:solidFill>
-                  <a:srgbClr val="1A1A1A"/>
-                </a:solidFill>
-                <a:latin typeface="Georgia" pitchFamily="34" charset="0"/>
-                <a:ea typeface="Georgia" pitchFamily="34" charset="-122"/>
-                <a:cs typeface="Georgia" pitchFamily="34" charset="-120"/>
-              </a:rPr>
-              <a:t>. Tirthaji died (1960) before producing it; his book was published posthumously (1965).</a:t>
-            </a:r>
-            <a:endParaRPr lang="en-US" sz="1200" dirty="0"/>
-          </a:p>
-        </p:txBody>
-      </p:sp>
-      <p:sp>
-        <p:nvSpPr>
-          <p:cNvPr id="20" name="Text 18"/>
-          <p:cNvSpPr/>
-          <p:nvPr/>
-        </p:nvSpPr>
-        <p:spPr>
-          <a:xfrm>
-            <a:off x="634901" y="4744938"/>
-            <a:ext cx="8102798" cy="487561"/>
-          </a:xfrm>
-          <a:prstGeom prst="rect">
-            <a:avLst/>
-          </a:prstGeom>
-          <a:noFill/>
-          <a:ln/>
-        </p:spPr>
-        <p:txBody>
-          <a:bodyPr wrap="square" lIns="0" tIns="0" rIns="0" bIns="0" rtlCol="0" anchor="t"/>
-          <a:lstStyle/>
-          <a:p>
-            <a:pPr algn="l" marL="342900" indent="-342900">
-              <a:lnSpc>
-                <a:spcPts val="1620"/>
-              </a:lnSpc>
-              <a:spcAft>
-                <a:spcPts val="300"/>
-              </a:spcAft>
-              <a:buSzPct val="100000"/>
-              <a:buChar char="•"/>
-            </a:pPr>
-            <a:r>
-              <a:rPr lang="en-US" sz="1200" b="1" dirty="0">
-                <a:solidFill>
-                  <a:srgbClr val="1A1A1A"/>
-                </a:solidFill>
-                <a:latin typeface="Georgia" pitchFamily="34" charset="0"/>
-                <a:ea typeface="Georgia" pitchFamily="34" charset="-122"/>
-                <a:cs typeface="Georgia" pitchFamily="34" charset="-120"/>
-              </a:rPr>
-              <a:t>What's at stake.</a:t>
-            </a:r>
-            <a:pPr algn="l" indent="0" marL="0">
-              <a:lnSpc>
-                <a:spcPts val="1620"/>
-              </a:lnSpc>
-              <a:spcAft>
-                <a:spcPts val="300"/>
-              </a:spcAft>
-              <a:buNone/>
-            </a:pPr>
-            <a:r>
-              <a:rPr lang="en-US" sz="1200" dirty="0">
-                <a:solidFill>
-                  <a:srgbClr val="1A1A1A"/>
-                </a:solidFill>
-                <a:latin typeface="Georgia" pitchFamily="34" charset="0"/>
-                <a:ea typeface="Georgia" pitchFamily="34" charset="-122"/>
-                <a:cs typeface="Georgia" pitchFamily="34" charset="-120"/>
-              </a:rPr>
-              <a:t> If the sūtras are Vedic, they're 3000+ years old — a major historical claim. If they're not, they're a brilliant 20th-century synthesis — </a:t>
-            </a:r>
-            <a:pPr algn="l" indent="0" marL="0">
-              <a:lnSpc>
-                <a:spcPts val="1620"/>
-              </a:lnSpc>
-              <a:spcAft>
-                <a:spcPts val="300"/>
-              </a:spcAft>
-              <a:buNone/>
-            </a:pPr>
-            <a:r>
-              <a:rPr lang="en-US" sz="1200" i="1" dirty="0">
-                <a:solidFill>
-                  <a:srgbClr val="1A1A1A"/>
-                </a:solidFill>
-                <a:latin typeface="Georgia" pitchFamily="34" charset="0"/>
-                <a:ea typeface="Georgia" pitchFamily="34" charset="-122"/>
-                <a:cs typeface="Georgia" pitchFamily="34" charset="-120"/>
-              </a:rPr>
-              <a:t>which would also be a real achievement, just a different one</a:t>
-            </a:r>
-            <a:pPr algn="l" indent="0" marL="0">
-              <a:lnSpc>
-                <a:spcPts val="1620"/>
-              </a:lnSpc>
-              <a:spcAft>
-                <a:spcPts val="300"/>
-              </a:spcAft>
-              <a:buNone/>
-            </a:pPr>
-            <a:r>
-              <a:rPr lang="en-US" sz="1200" dirty="0">
-                <a:solidFill>
-                  <a:srgbClr val="1A1A1A"/>
-                </a:solidFill>
-                <a:latin typeface="Georgia" pitchFamily="34" charset="0"/>
-                <a:ea typeface="Georgia" pitchFamily="34" charset="-122"/>
-                <a:cs typeface="Georgia" pitchFamily="34" charset="-120"/>
-              </a:rPr>
-              <a:t>.</a:t>
-            </a:r>
-            <a:endParaRPr lang="en-US" sz="1200" dirty="0"/>
-          </a:p>
-        </p:txBody>
-      </p:sp>
-      <p:sp>
-        <p:nvSpPr>
-          <p:cNvPr id="21" name="Text 19"/>
-          <p:cNvSpPr/>
-          <p:nvPr/>
-        </p:nvSpPr>
-        <p:spPr>
-          <a:xfrm>
-            <a:off x="634901" y="5334000"/>
-            <a:ext cx="8102798" cy="281880"/>
-          </a:xfrm>
-          <a:prstGeom prst="rect">
-            <a:avLst/>
-          </a:prstGeom>
-          <a:noFill/>
-          <a:ln/>
-        </p:spPr>
-        <p:txBody>
-          <a:bodyPr wrap="square" lIns="0" tIns="0" rIns="0" bIns="0" rtlCol="0" anchor="t"/>
-          <a:lstStyle/>
-          <a:p>
-            <a:pPr algn="l" marL="342900" indent="-342900">
-              <a:lnSpc>
-                <a:spcPts val="1620"/>
-              </a:lnSpc>
-              <a:spcAft>
-                <a:spcPts val="300"/>
-              </a:spcAft>
-              <a:buSzPct val="100000"/>
-              <a:buChar char="•"/>
-            </a:pPr>
-            <a:r>
-              <a:rPr lang="en-US" sz="1200" b="1" dirty="0">
-                <a:solidFill>
-                  <a:srgbClr val="1A1A1A"/>
-                </a:solidFill>
-                <a:latin typeface="Georgia" pitchFamily="34" charset="0"/>
-                <a:ea typeface="Georgia" pitchFamily="34" charset="-122"/>
-                <a:cs typeface="Georgia" pitchFamily="34" charset="-120"/>
-              </a:rPr>
-              <a:t>Preview Day 6.</a:t>
-            </a:r>
-            <a:pPr algn="l" indent="0" marL="0">
-              <a:lnSpc>
-                <a:spcPts val="1620"/>
-              </a:lnSpc>
-              <a:spcAft>
-                <a:spcPts val="300"/>
-              </a:spcAft>
-              <a:buNone/>
-            </a:pPr>
-            <a:r>
-              <a:rPr lang="en-US" sz="1200" dirty="0">
-                <a:solidFill>
-                  <a:srgbClr val="1A1A1A"/>
-                </a:solidFill>
-                <a:latin typeface="Georgia" pitchFamily="34" charset="0"/>
-                <a:ea typeface="Georgia" pitchFamily="34" charset="-122"/>
-                <a:cs typeface="Georgia" pitchFamily="34" charset="-120"/>
-              </a:rPr>
-              <a:t> </a:t>
-            </a:r>
-            <a:pPr algn="l" indent="0" marL="0">
-              <a:lnSpc>
-                <a:spcPts val="1620"/>
-              </a:lnSpc>
-              <a:spcAft>
-                <a:spcPts val="300"/>
-              </a:spcAft>
-              <a:buNone/>
-            </a:pPr>
-            <a:r>
-              <a:rPr lang="en-US" sz="1200" i="1" dirty="0">
-                <a:solidFill>
-                  <a:srgbClr val="1A1A1A"/>
-                </a:solidFill>
-                <a:latin typeface="Georgia" pitchFamily="34" charset="0"/>
-                <a:ea typeface="Georgia" pitchFamily="34" charset="-122"/>
-                <a:cs typeface="Georgia" pitchFamily="34" charset="-120"/>
-              </a:rPr>
-              <a:t>"Day 6 we read the scholarly critique by S. G. Dani (1993). For now, hold the question open."</a:t>
-            </a:r>
-            <a:endParaRPr lang="en-US" sz="1200" dirty="0"/>
-          </a:p>
-        </p:txBody>
-      </p:sp>
-      <p:sp>
-        <p:nvSpPr>
-          <p:cNvPr id="22" name="Text 20"/>
-          <p:cNvSpPr/>
-          <p:nvPr/>
-        </p:nvSpPr>
-        <p:spPr>
-          <a:xfrm>
-            <a:off x="406301" y="5780931"/>
+            <a:off x="406301" y="4434929"/>
             <a:ext cx="8498026" cy="213271"/>
           </a:xfrm>
           <a:prstGeom prst="rect">
@@ -4534,7 +5348,7 @@
                 <a:ea typeface="Times New Roman" pitchFamily="34" charset="-122"/>
                 <a:cs typeface="Times New Roman" pitchFamily="34" charset="-120"/>
               </a:rPr>
-              <a:t>Wrap-up (10 min)</a:t>
+              <a:t>Core (25 min) — The 16 sūtras and the provenance puzzle</a:t>
             </a:r>
             <a:endParaRPr lang="en-US" sz="1800" dirty="0"/>
           </a:p>
@@ -4548,8 +5362,8 @@
         </p:nvSpPr>
         <p:spPr>
           <a:xfrm>
-            <a:off x="406301" y="870942"/>
-            <a:ext cx="8498026" cy="639812"/>
+            <a:off x="634901" y="883593"/>
+            <a:ext cx="8102798" cy="281880"/>
           </a:xfrm>
           <a:prstGeom prst="rect">
             <a:avLst/>
@@ -4561,20 +5375,18 @@
           <a:bodyPr wrap="square" lIns="0" tIns="0" rIns="0" bIns="0" rtlCol="0" anchor="t"/>
           <a:lstStyle/>
           <a:p>
-            <a:pPr algn="l" indent="0" marL="0">
-              <a:lnSpc>
-                <a:spcPts val="1680"/>
-              </a:lnSpc>
-              <a:spcBef>
-                <a:spcPts val="300"/>
-              </a:spcBef>
-              <a:spcAft>
-                <a:spcPts val="300"/>
-              </a:spcAft>
-              <a:buNone/>
-            </a:pPr>
-            <a:r>
-              <a:rPr lang="en-US" sz="1200" dirty="0">
+            <a:pPr algn="l" marL="342900" indent="-342900">
+              <a:lnSpc>
+                <a:spcPts val="1620"/>
+              </a:lnSpc>
+              <a:spcAft>
+                <a:spcPts val="300"/>
+              </a:spcAft>
+              <a:buSzPct val="100000"/>
+              <a:buChar char="•"/>
+            </a:pPr>
+            <a:r>
+              <a:rPr lang="en-US" sz="1200" b="1" dirty="0">
                 <a:solidFill>
                   <a:srgbClr val="1A1A1A"/>
                 </a:solidFill>
@@ -4582,7 +5394,27 @@
                 <a:ea typeface="Georgia" pitchFamily="34" charset="-122"/>
                 <a:cs typeface="Georgia" pitchFamily="34" charset="-120"/>
               </a:rPr>
-              <a:t>– Quick survey on the board:   – Hands up if you think the sūtras are likely Vedic.   – Hands up if you think they're more likely 20th-century.   – Hands up if you don't know yet. – Discuss the distribution. – Homework: read Tirthaji's preface (handout). Bring questions.</a:t>
+              <a:t>The 16 sūtras</a:t>
+            </a:r>
+            <a:pPr algn="l" indent="0" marL="0">
+              <a:lnSpc>
+                <a:spcPts val="1620"/>
+              </a:lnSpc>
+              <a:spcAft>
+                <a:spcPts val="300"/>
+              </a:spcAft>
+              <a:buNone/>
+            </a:pPr>
+            <a:r>
+              <a:rPr lang="en-US" sz="1200" dirty="0">
+                <a:solidFill>
+                  <a:srgbClr val="1A1A1A"/>
+                </a:solidFill>
+                <a:latin typeface="Georgia" pitchFamily="34" charset="0"/>
+                <a:ea typeface="Georgia" pitchFamily="34" charset="-122"/>
+                <a:cs typeface="Georgia" pitchFamily="34" charset="-120"/>
+              </a:rPr>
+              <a:t> (write on board, abbreviated):</a:t>
             </a:r>
             <a:endParaRPr lang="en-US" sz="1200" dirty="0"/>
           </a:p>
@@ -4740,7 +5572,7 @@
                 <a:ea typeface="Times New Roman" pitchFamily="34" charset="-122"/>
                 <a:cs typeface="Times New Roman" pitchFamily="34" charset="-120"/>
               </a:rPr>
-              <a:t>Differentiation</a:t>
+              <a:t>Core (25 min) — The 16 sūtras and the provenance puzzle (cont.)</a:t>
             </a:r>
             <a:endParaRPr lang="en-US" sz="1800" dirty="0"/>
           </a:p>
@@ -4754,111 +5586,432 @@
         </p:nvSpPr>
         <p:spPr>
           <a:xfrm>
-            <a:off x="634901" y="883593"/>
-            <a:ext cx="8102798" cy="731341"/>
-          </a:xfrm>
-          <a:prstGeom prst="rect">
+            <a:off x="406301" y="883593"/>
+            <a:ext cx="8331398" cy="1825079"/>
+          </a:xfrm>
+          <a:prstGeom prst="rect">
+            <a:avLst/>
+          </a:prstGeom>
+          <a:solidFill>
+            <a:srgbClr val="FFFFFF"/>
+          </a:solidFill>
+          <a:ln/>
+        </p:spPr>
+        <p:txBody>
+          <a:bodyPr wrap="square" rtlCol="0" anchor="ctr"/>
+          <a:lstStyle/>
+          <a:p>
+            <a:pPr indent="0" marL="0">
+              <a:buNone/>
+            </a:pPr>
+            <a:endParaRPr lang="en-US" dirty="0"/>
+          </a:p>
+        </p:txBody>
+      </p:sp>
+      <p:sp>
+        <p:nvSpPr>
+          <p:cNvPr id="5" name="Shape 3"/>
+          <p:cNvSpPr/>
+          <p:nvPr/>
+        </p:nvSpPr>
+        <p:spPr>
+          <a:xfrm>
+            <a:off x="430113" y="883593"/>
+            <a:ext cx="0" cy="1825079"/>
+          </a:xfrm>
+          <a:prstGeom prst="line">
             <a:avLst/>
           </a:prstGeom>
           <a:noFill/>
+          <a:ln w="47625">
+            <a:solidFill>
+              <a:srgbClr val="5D1D2E"/>
+            </a:solidFill>
+            <a:prstDash val="solid"/>
+          </a:ln>
+        </p:spPr>
+      </p:sp>
+      <p:sp>
+        <p:nvSpPr>
+          <p:cNvPr id="6" name="Text 4"/>
+          <p:cNvSpPr/>
+          <p:nvPr/>
+        </p:nvSpPr>
+        <p:spPr>
+          <a:xfrm>
+            <a:off x="631627" y="1010543"/>
+            <a:ext cx="8086939" cy="174575"/>
+          </a:xfrm>
+          <a:prstGeom prst="rect">
+            <a:avLst/>
+          </a:prstGeom>
+          <a:noFill/>
           <a:ln/>
         </p:spPr>
         <p:txBody>
           <a:bodyPr wrap="square" lIns="0" tIns="0" rIns="0" bIns="0" rtlCol="0" anchor="t"/>
           <a:lstStyle/>
           <a:p>
-            <a:pPr algn="l" marL="342900" indent="-342900">
-              <a:lnSpc>
-                <a:spcPts val="1620"/>
-              </a:lnSpc>
-              <a:spcAft>
-                <a:spcPts val="300"/>
-              </a:spcAft>
-              <a:buSzPct val="100000"/>
-              <a:buChar char="•"/>
-            </a:pPr>
-            <a:r>
-              <a:rPr lang="en-US" sz="1200" b="1" dirty="0">
-                <a:solidFill>
-                  <a:srgbClr val="1A1A1A"/>
-                </a:solidFill>
-                <a:latin typeface="Georgia" pitchFamily="34" charset="0"/>
-                <a:ea typeface="Georgia" pitchFamily="34" charset="-122"/>
-                <a:cs typeface="Georgia" pitchFamily="34" charset="-120"/>
-              </a:rPr>
-              <a:t>Tier up:</a:t>
-            </a:r>
-            <a:pPr algn="l" indent="0" marL="0">
-              <a:lnSpc>
-                <a:spcPts val="1620"/>
-              </a:lnSpc>
-              <a:spcAft>
-                <a:spcPts val="300"/>
-              </a:spcAft>
-              <a:buNone/>
-            </a:pPr>
-            <a:r>
-              <a:rPr lang="en-US" sz="1200" dirty="0">
-                <a:solidFill>
-                  <a:srgbClr val="1A1A1A"/>
-                </a:solidFill>
-                <a:latin typeface="Georgia" pitchFamily="34" charset="0"/>
-                <a:ea typeface="Georgia" pitchFamily="34" charset="-122"/>
-                <a:cs typeface="Georgia" pitchFamily="34" charset="-120"/>
-              </a:rPr>
-              <a:t> Read Plofker (2009), Ch. 1 — the broader history of Indian mathematics. What was happening in the 19th–early 20th c. that might explain Tirthaji's project?</a:t>
-            </a:r>
-            <a:endParaRPr lang="en-US" sz="1200" dirty="0"/>
-          </a:p>
-          <a:p>
-            <a:pPr algn="l" marL="342900" indent="-342900">
-              <a:lnSpc>
-                <a:spcPts val="1620"/>
-              </a:lnSpc>
-              <a:spcAft>
-                <a:spcPts val="300"/>
-              </a:spcAft>
-              <a:buSzPct val="100000"/>
-              <a:buChar char="•"/>
-            </a:pPr>
-            <a:r>
-              <a:rPr lang="en-US" sz="1200" b="1" dirty="0">
-                <a:solidFill>
-                  <a:srgbClr val="1A1A1A"/>
-                </a:solidFill>
-                <a:latin typeface="Georgia" pitchFamily="34" charset="0"/>
-                <a:ea typeface="Georgia" pitchFamily="34" charset="-122"/>
-                <a:cs typeface="Georgia" pitchFamily="34" charset="-120"/>
-              </a:rPr>
-              <a:t>Tier down:</a:t>
-            </a:r>
-            <a:pPr algn="l" indent="0" marL="0">
-              <a:lnSpc>
-                <a:spcPts val="1620"/>
-              </a:lnSpc>
-              <a:spcAft>
-                <a:spcPts val="300"/>
-              </a:spcAft>
-              <a:buNone/>
-            </a:pPr>
-            <a:r>
-              <a:rPr lang="en-US" sz="1200" dirty="0">
-                <a:solidFill>
-                  <a:srgbClr val="1A1A1A"/>
-                </a:solidFill>
-                <a:latin typeface="Georgia" pitchFamily="34" charset="0"/>
-                <a:ea typeface="Georgia" pitchFamily="34" charset="-122"/>
-                <a:cs typeface="Georgia" pitchFamily="34" charset="-120"/>
-              </a:rPr>
-              <a:t> Focus on memorising the 16 sūtra names this week. The provenance question deepens at Day 6.</a:t>
-            </a:r>
-            <a:endParaRPr lang="en-US" sz="1200" dirty="0"/>
-          </a:p>
-        </p:txBody>
-      </p:sp>
-      <p:sp>
-        <p:nvSpPr>
-          <p:cNvPr id="5" name="Text 3"/>
+            <a:pPr algn="l" indent="0" marL="0">
+              <a:lnSpc>
+                <a:spcPts val="1375"/>
+              </a:lnSpc>
+              <a:buNone/>
+            </a:pPr>
+            <a:r>
+              <a:rPr lang="en-US" sz="1100" dirty="0">
+                <a:solidFill>
+                  <a:srgbClr val="1A1A1A"/>
+                </a:solidFill>
+                <a:latin typeface="Courier New" pitchFamily="34" charset="0"/>
+                <a:ea typeface="Courier New" pitchFamily="34" charset="-122"/>
+                <a:cs typeface="Courier New" pitchFamily="34" charset="-120"/>
+              </a:rPr>
+              <a:t>1. Ekādhikena Pūrveṇa     2. Nikhilam Navataścaramaṁ Daśataḥ</a:t>
+            </a:r>
+            <a:endParaRPr lang="en-US" sz="1100" dirty="0"/>
+          </a:p>
+        </p:txBody>
+      </p:sp>
+      <p:sp>
+        <p:nvSpPr>
+          <p:cNvPr id="7" name="Text 5"/>
+          <p:cNvSpPr/>
+          <p:nvPr/>
+        </p:nvSpPr>
+        <p:spPr>
+          <a:xfrm>
+            <a:off x="631627" y="1185118"/>
+            <a:ext cx="8086939" cy="174575"/>
+          </a:xfrm>
+          <a:prstGeom prst="rect">
+            <a:avLst/>
+          </a:prstGeom>
+          <a:noFill/>
+          <a:ln/>
+        </p:spPr>
+        <p:txBody>
+          <a:bodyPr wrap="square" lIns="0" tIns="0" rIns="0" bIns="0" rtlCol="0" anchor="t"/>
+          <a:lstStyle/>
+          <a:p>
+            <a:pPr algn="l" indent="0" marL="0">
+              <a:lnSpc>
+                <a:spcPts val="1375"/>
+              </a:lnSpc>
+              <a:buNone/>
+            </a:pPr>
+            <a:r>
+              <a:rPr lang="en-US" sz="1100" dirty="0">
+                <a:solidFill>
+                  <a:srgbClr val="1A1A1A"/>
+                </a:solidFill>
+                <a:latin typeface="Courier New" pitchFamily="34" charset="0"/>
+                <a:ea typeface="Courier New" pitchFamily="34" charset="-122"/>
+                <a:cs typeface="Courier New" pitchFamily="34" charset="-120"/>
+              </a:rPr>
+              <a:t>3. Ūrdhva-Tiryagbhyāṁ     4. Parāvartya Yojayet</a:t>
+            </a:r>
+            <a:endParaRPr lang="en-US" sz="1100" dirty="0"/>
+          </a:p>
+        </p:txBody>
+      </p:sp>
+      <p:sp>
+        <p:nvSpPr>
+          <p:cNvPr id="8" name="Text 6"/>
+          <p:cNvSpPr/>
+          <p:nvPr/>
+        </p:nvSpPr>
+        <p:spPr>
+          <a:xfrm>
+            <a:off x="631627" y="1359694"/>
+            <a:ext cx="8086939" cy="174575"/>
+          </a:xfrm>
+          <a:prstGeom prst="rect">
+            <a:avLst/>
+          </a:prstGeom>
+          <a:noFill/>
+          <a:ln/>
+        </p:spPr>
+        <p:txBody>
+          <a:bodyPr wrap="square" lIns="0" tIns="0" rIns="0" bIns="0" rtlCol="0" anchor="t"/>
+          <a:lstStyle/>
+          <a:p>
+            <a:pPr algn="l" indent="0" marL="0">
+              <a:lnSpc>
+                <a:spcPts val="1375"/>
+              </a:lnSpc>
+              <a:buNone/>
+            </a:pPr>
+            <a:r>
+              <a:rPr lang="en-US" sz="1100" dirty="0">
+                <a:solidFill>
+                  <a:srgbClr val="1A1A1A"/>
+                </a:solidFill>
+                <a:latin typeface="Courier New" pitchFamily="34" charset="0"/>
+                <a:ea typeface="Courier New" pitchFamily="34" charset="-122"/>
+                <a:cs typeface="Courier New" pitchFamily="34" charset="-120"/>
+              </a:rPr>
+              <a:t>5. Śūnyaṁ Sāmyasamuccaye  6. (Ānurūpye) Śūnyam Anyat</a:t>
+            </a:r>
+            <a:endParaRPr lang="en-US" sz="1100" dirty="0"/>
+          </a:p>
+        </p:txBody>
+      </p:sp>
+      <p:sp>
+        <p:nvSpPr>
+          <p:cNvPr id="9" name="Text 7"/>
+          <p:cNvSpPr/>
+          <p:nvPr/>
+        </p:nvSpPr>
+        <p:spPr>
+          <a:xfrm>
+            <a:off x="631627" y="1534269"/>
+            <a:ext cx="8086939" cy="174575"/>
+          </a:xfrm>
+          <a:prstGeom prst="rect">
+            <a:avLst/>
+          </a:prstGeom>
+          <a:noFill/>
+          <a:ln/>
+        </p:spPr>
+        <p:txBody>
+          <a:bodyPr wrap="square" lIns="0" tIns="0" rIns="0" bIns="0" rtlCol="0" anchor="t"/>
+          <a:lstStyle/>
+          <a:p>
+            <a:pPr algn="l" indent="0" marL="0">
+              <a:lnSpc>
+                <a:spcPts val="1375"/>
+              </a:lnSpc>
+              <a:buNone/>
+            </a:pPr>
+            <a:r>
+              <a:rPr lang="en-US" sz="1100" dirty="0">
+                <a:solidFill>
+                  <a:srgbClr val="1A1A1A"/>
+                </a:solidFill>
+                <a:latin typeface="Courier New" pitchFamily="34" charset="0"/>
+                <a:ea typeface="Courier New" pitchFamily="34" charset="-122"/>
+                <a:cs typeface="Courier New" pitchFamily="34" charset="-120"/>
+              </a:rPr>
+              <a:t>7. Sankalana Vyavakalanābhyām (← we'll meet this one)</a:t>
+            </a:r>
+            <a:endParaRPr lang="en-US" sz="1100" dirty="0"/>
+          </a:p>
+        </p:txBody>
+      </p:sp>
+      <p:sp>
+        <p:nvSpPr>
+          <p:cNvPr id="10" name="Text 8"/>
+          <p:cNvSpPr/>
+          <p:nvPr/>
+        </p:nvSpPr>
+        <p:spPr>
+          <a:xfrm>
+            <a:off x="631627" y="1708845"/>
+            <a:ext cx="8086939" cy="174575"/>
+          </a:xfrm>
+          <a:prstGeom prst="rect">
+            <a:avLst/>
+          </a:prstGeom>
+          <a:noFill/>
+          <a:ln/>
+        </p:spPr>
+        <p:txBody>
+          <a:bodyPr wrap="square" lIns="0" tIns="0" rIns="0" bIns="0" rtlCol="0" anchor="t"/>
+          <a:lstStyle/>
+          <a:p>
+            <a:pPr algn="l" indent="0" marL="0">
+              <a:lnSpc>
+                <a:spcPts val="1375"/>
+              </a:lnSpc>
+              <a:buNone/>
+            </a:pPr>
+            <a:r>
+              <a:rPr lang="en-US" sz="1100" dirty="0">
+                <a:solidFill>
+                  <a:srgbClr val="1A1A1A"/>
+                </a:solidFill>
+                <a:latin typeface="Courier New" pitchFamily="34" charset="0"/>
+                <a:ea typeface="Courier New" pitchFamily="34" charset="-122"/>
+                <a:cs typeface="Courier New" pitchFamily="34" charset="-120"/>
+              </a:rPr>
+              <a:t>8. Pūraṇāpūraṇābhyām (← and this one)</a:t>
+            </a:r>
+            <a:endParaRPr lang="en-US" sz="1100" dirty="0"/>
+          </a:p>
+        </p:txBody>
+      </p:sp>
+      <p:sp>
+        <p:nvSpPr>
+          <p:cNvPr id="11" name="Text 9"/>
+          <p:cNvSpPr/>
+          <p:nvPr/>
+        </p:nvSpPr>
+        <p:spPr>
+          <a:xfrm>
+            <a:off x="631627" y="1883420"/>
+            <a:ext cx="8086939" cy="174575"/>
+          </a:xfrm>
+          <a:prstGeom prst="rect">
+            <a:avLst/>
+          </a:prstGeom>
+          <a:noFill/>
+          <a:ln/>
+        </p:spPr>
+        <p:txBody>
+          <a:bodyPr wrap="square" lIns="0" tIns="0" rIns="0" bIns="0" rtlCol="0" anchor="t"/>
+          <a:lstStyle/>
+          <a:p>
+            <a:pPr algn="l" indent="0" marL="0">
+              <a:lnSpc>
+                <a:spcPts val="1375"/>
+              </a:lnSpc>
+              <a:buNone/>
+            </a:pPr>
+            <a:r>
+              <a:rPr lang="en-US" sz="1100" dirty="0">
+                <a:solidFill>
+                  <a:srgbClr val="1A1A1A"/>
+                </a:solidFill>
+                <a:latin typeface="Courier New" pitchFamily="34" charset="0"/>
+                <a:ea typeface="Courier New" pitchFamily="34" charset="-122"/>
+                <a:cs typeface="Courier New" pitchFamily="34" charset="-120"/>
+              </a:rPr>
+              <a:t>9. Calana-Kalanābhyām     10. Yāvadūnam</a:t>
+            </a:r>
+            <a:endParaRPr lang="en-US" sz="1100" dirty="0"/>
+          </a:p>
+        </p:txBody>
+      </p:sp>
+      <p:sp>
+        <p:nvSpPr>
+          <p:cNvPr id="12" name="Text 10"/>
+          <p:cNvSpPr/>
+          <p:nvPr/>
+        </p:nvSpPr>
+        <p:spPr>
+          <a:xfrm>
+            <a:off x="631627" y="2057995"/>
+            <a:ext cx="8086939" cy="174575"/>
+          </a:xfrm>
+          <a:prstGeom prst="rect">
+            <a:avLst/>
+          </a:prstGeom>
+          <a:noFill/>
+          <a:ln/>
+        </p:spPr>
+        <p:txBody>
+          <a:bodyPr wrap="square" lIns="0" tIns="0" rIns="0" bIns="0" rtlCol="0" anchor="t"/>
+          <a:lstStyle/>
+          <a:p>
+            <a:pPr algn="l" indent="0" marL="0">
+              <a:lnSpc>
+                <a:spcPts val="1375"/>
+              </a:lnSpc>
+              <a:buNone/>
+            </a:pPr>
+            <a:r>
+              <a:rPr lang="en-US" sz="1100" dirty="0">
+                <a:solidFill>
+                  <a:srgbClr val="1A1A1A"/>
+                </a:solidFill>
+                <a:latin typeface="Courier New" pitchFamily="34" charset="0"/>
+                <a:ea typeface="Courier New" pitchFamily="34" charset="-122"/>
+                <a:cs typeface="Courier New" pitchFamily="34" charset="-120"/>
+              </a:rPr>
+              <a:t>11. Vyaṣṭi-Samaṣṭiḥ        12. Śeṣānyaṅkena Caramena</a:t>
+            </a:r>
+            <a:endParaRPr lang="en-US" sz="1100" dirty="0"/>
+          </a:p>
+        </p:txBody>
+      </p:sp>
+      <p:sp>
+        <p:nvSpPr>
+          <p:cNvPr id="13" name="Text 11"/>
+          <p:cNvSpPr/>
+          <p:nvPr/>
+        </p:nvSpPr>
+        <p:spPr>
+          <a:xfrm>
+            <a:off x="631627" y="2232571"/>
+            <a:ext cx="8086939" cy="174575"/>
+          </a:xfrm>
+          <a:prstGeom prst="rect">
+            <a:avLst/>
+          </a:prstGeom>
+          <a:noFill/>
+          <a:ln/>
+        </p:spPr>
+        <p:txBody>
+          <a:bodyPr wrap="square" lIns="0" tIns="0" rIns="0" bIns="0" rtlCol="0" anchor="t"/>
+          <a:lstStyle/>
+          <a:p>
+            <a:pPr algn="l" indent="0" marL="0">
+              <a:lnSpc>
+                <a:spcPts val="1375"/>
+              </a:lnSpc>
+              <a:buNone/>
+            </a:pPr>
+            <a:r>
+              <a:rPr lang="en-US" sz="1100" dirty="0">
+                <a:solidFill>
+                  <a:srgbClr val="1A1A1A"/>
+                </a:solidFill>
+                <a:latin typeface="Courier New" pitchFamily="34" charset="0"/>
+                <a:ea typeface="Courier New" pitchFamily="34" charset="-122"/>
+                <a:cs typeface="Courier New" pitchFamily="34" charset="-120"/>
+              </a:rPr>
+              <a:t>13. Sopāntya-dvayam Antyam 14. Ekanyūnena Pūrveṇa</a:t>
+            </a:r>
+            <a:endParaRPr lang="en-US" sz="1100" dirty="0"/>
+          </a:p>
+        </p:txBody>
+      </p:sp>
+      <p:sp>
+        <p:nvSpPr>
+          <p:cNvPr id="14" name="Text 12"/>
+          <p:cNvSpPr/>
+          <p:nvPr/>
+        </p:nvSpPr>
+        <p:spPr>
+          <a:xfrm>
+            <a:off x="631627" y="2407146"/>
+            <a:ext cx="8086939" cy="174575"/>
+          </a:xfrm>
+          <a:prstGeom prst="rect">
+            <a:avLst/>
+          </a:prstGeom>
+          <a:noFill/>
+          <a:ln/>
+        </p:spPr>
+        <p:txBody>
+          <a:bodyPr wrap="square" lIns="0" tIns="0" rIns="0" bIns="0" rtlCol="0" anchor="t"/>
+          <a:lstStyle/>
+          <a:p>
+            <a:pPr algn="l" indent="0" marL="0">
+              <a:lnSpc>
+                <a:spcPts val="1375"/>
+              </a:lnSpc>
+              <a:buNone/>
+            </a:pPr>
+            <a:r>
+              <a:rPr lang="en-US" sz="1100" dirty="0">
+                <a:solidFill>
+                  <a:srgbClr val="1A1A1A"/>
+                </a:solidFill>
+                <a:latin typeface="Courier New" pitchFamily="34" charset="0"/>
+                <a:ea typeface="Courier New" pitchFamily="34" charset="-122"/>
+                <a:cs typeface="Courier New" pitchFamily="34" charset="-120"/>
+              </a:rPr>
+              <a:t>15. Guṇitasamuccayaḥ      16. Guṇaka Samuccayaḥ</a:t>
+            </a:r>
+            <a:endParaRPr lang="en-US" sz="1100" dirty="0"/>
+          </a:p>
+        </p:txBody>
+      </p:sp>
+      <p:sp>
+        <p:nvSpPr>
+          <p:cNvPr id="15" name="Text 13"/>
           <p:cNvSpPr/>
           <p:nvPr/>
         </p:nvSpPr>
@@ -5008,7 +6161,7 @@
                 <a:ea typeface="Times New Roman" pitchFamily="34" charset="-122"/>
                 <a:cs typeface="Times New Roman" pitchFamily="34" charset="-120"/>
               </a:rPr>
-              <a:t>Teacher notes</a:t>
+              <a:t>Core (25 min) — The 16 sūtras and the provenance puzzle (cont.)</a:t>
             </a:r>
             <a:endParaRPr lang="en-US" sz="1800" dirty="0"/>
           </a:p>
@@ -5022,8 +6175,8 @@
         </p:nvSpPr>
         <p:spPr>
           <a:xfrm>
-            <a:off x="406301" y="870942"/>
-            <a:ext cx="8498026" cy="426541"/>
+            <a:off x="634901" y="883593"/>
+            <a:ext cx="8102798" cy="281880"/>
           </a:xfrm>
           <a:prstGeom prst="rect">
             <a:avLst/>
@@ -5035,20 +6188,18 @@
           <a:bodyPr wrap="square" lIns="0" tIns="0" rIns="0" bIns="0" rtlCol="0" anchor="t"/>
           <a:lstStyle/>
           <a:p>
-            <a:pPr algn="l" indent="0" marL="0">
-              <a:lnSpc>
-                <a:spcPts val="1680"/>
-              </a:lnSpc>
-              <a:spcBef>
-                <a:spcPts val="300"/>
-              </a:spcBef>
-              <a:spcAft>
-                <a:spcPts val="300"/>
-              </a:spcAft>
-              <a:buNone/>
-            </a:pPr>
-            <a:r>
-              <a:rPr lang="en-US" sz="1200" dirty="0">
+            <a:pPr algn="l" marL="342900" indent="-342900">
+              <a:lnSpc>
+                <a:spcPts val="1620"/>
+              </a:lnSpc>
+              <a:spcAft>
+                <a:spcPts val="300"/>
+              </a:spcAft>
+              <a:buSzPct val="100000"/>
+              <a:buChar char="•"/>
+            </a:pPr>
+            <a:r>
+              <a:rPr lang="en-US" sz="1200" b="1" dirty="0">
                 <a:solidFill>
                   <a:srgbClr val="1A1A1A"/>
                 </a:solidFill>
@@ -5056,7 +6207,27 @@
                 <a:ea typeface="Georgia" pitchFamily="34" charset="-122"/>
                 <a:cs typeface="Georgia" pitchFamily="34" charset="-120"/>
               </a:rPr>
-              <a:t>– Most students will start sympathetic to the "Vedic = ancient" claim. That's a starting point, not a fault. – Don't decide the question for the class. The point is that they read primary and secondary sources, then form their own position.</a:t>
+              <a:t>Tirthaji's claim.</a:t>
+            </a:r>
+            <a:pPr algn="l" indent="0" marL="0">
+              <a:lnSpc>
+                <a:spcPts val="1620"/>
+              </a:lnSpc>
+              <a:spcAft>
+                <a:spcPts val="300"/>
+              </a:spcAft>
+              <a:buNone/>
+            </a:pPr>
+            <a:r>
+              <a:rPr lang="en-US" sz="1200" dirty="0">
+                <a:solidFill>
+                  <a:srgbClr val="1A1A1A"/>
+                </a:solidFill>
+                <a:latin typeface="Georgia" pitchFamily="34" charset="0"/>
+                <a:ea typeface="Georgia" pitchFamily="34" charset="-122"/>
+                <a:cs typeface="Georgia" pitchFamily="34" charset="-120"/>
+              </a:rPr>
+              <a:t> Read aloud the relevant sentence from Tirthaji's preface (in handout):</a:t>
             </a:r>
             <a:endParaRPr lang="en-US" sz="1200" dirty="0"/>
           </a:p>
@@ -5065,6 +6236,247 @@
       <p:sp>
         <p:nvSpPr>
           <p:cNvPr id="5" name="Text 3"/>
+          <p:cNvSpPr/>
+          <p:nvPr/>
+        </p:nvSpPr>
+        <p:spPr>
+          <a:xfrm>
+            <a:off x="406301" y="1266974"/>
+            <a:ext cx="8331398" cy="611981"/>
+          </a:xfrm>
+          <a:prstGeom prst="rect">
+            <a:avLst/>
+          </a:prstGeom>
+          <a:solidFill>
+            <a:srgbClr val="FFFFFF"/>
+          </a:solidFill>
+          <a:ln/>
+        </p:spPr>
+        <p:txBody>
+          <a:bodyPr wrap="square" rtlCol="0" anchor="ctr"/>
+          <a:lstStyle/>
+          <a:p>
+            <a:pPr indent="0" marL="0">
+              <a:buNone/>
+            </a:pPr>
+            <a:endParaRPr lang="en-US" dirty="0"/>
+          </a:p>
+        </p:txBody>
+      </p:sp>
+      <p:sp>
+        <p:nvSpPr>
+          <p:cNvPr id="6" name="Shape 4"/>
+          <p:cNvSpPr/>
+          <p:nvPr/>
+        </p:nvSpPr>
+        <p:spPr>
+          <a:xfrm>
+            <a:off x="434876" y="1266974"/>
+            <a:ext cx="0" cy="611981"/>
+          </a:xfrm>
+          <a:prstGeom prst="line">
+            <a:avLst/>
+          </a:prstGeom>
+          <a:noFill/>
+          <a:ln w="57150">
+            <a:solidFill>
+              <a:srgbClr val="997929"/>
+            </a:solidFill>
+            <a:prstDash val="solid"/>
+          </a:ln>
+        </p:spPr>
+      </p:sp>
+      <p:sp>
+        <p:nvSpPr>
+          <p:cNvPr id="7" name="Text 5"/>
+          <p:cNvSpPr/>
+          <p:nvPr/>
+        </p:nvSpPr>
+        <p:spPr>
+          <a:xfrm>
+            <a:off x="692051" y="1457474"/>
+            <a:ext cx="7973389" cy="230981"/>
+          </a:xfrm>
+          <a:prstGeom prst="rect">
+            <a:avLst/>
+          </a:prstGeom>
+          <a:noFill/>
+          <a:ln/>
+        </p:spPr>
+        <p:txBody>
+          <a:bodyPr wrap="square" lIns="0" tIns="0" rIns="0" bIns="0" rtlCol="0" anchor="t"/>
+          <a:lstStyle/>
+          <a:p>
+            <a:pPr algn="l" indent="0" marL="0">
+              <a:lnSpc>
+                <a:spcPts val="1820"/>
+              </a:lnSpc>
+              <a:spcBef>
+                <a:spcPts val="300"/>
+              </a:spcBef>
+              <a:spcAft>
+                <a:spcPts val="300"/>
+              </a:spcAft>
+              <a:buNone/>
+            </a:pPr>
+            <a:r>
+              <a:rPr lang="en-US" sz="1300" dirty="0">
+                <a:solidFill>
+                  <a:srgbClr val="1A1A1A"/>
+                </a:solidFill>
+                <a:latin typeface="Times New Roman" pitchFamily="34" charset="0"/>
+                <a:ea typeface="Times New Roman" pitchFamily="34" charset="-122"/>
+                <a:cs typeface="Times New Roman" pitchFamily="34" charset="-120"/>
+              </a:rPr>
+              <a:t>"The sūtras (aphorisms) of </a:t>
+            </a:r>
+            <a:pPr algn="l" indent="0" marL="0">
+              <a:lnSpc>
+                <a:spcPts val="1820"/>
+              </a:lnSpc>
+              <a:spcBef>
+                <a:spcPts val="300"/>
+              </a:spcBef>
+              <a:spcAft>
+                <a:spcPts val="300"/>
+              </a:spcAft>
+              <a:buNone/>
+            </a:pPr>
+            <a:r>
+              <a:rPr lang="en-US" sz="1300" i="1" dirty="0">
+                <a:solidFill>
+                  <a:srgbClr val="1A1A1A"/>
+                </a:solidFill>
+                <a:latin typeface="Times New Roman" pitchFamily="34" charset="0"/>
+                <a:ea typeface="Times New Roman" pitchFamily="34" charset="-122"/>
+                <a:cs typeface="Times New Roman" pitchFamily="34" charset="-120"/>
+              </a:rPr>
+              <a:t>Atharva-veda Pariśiṣṭa</a:t>
+            </a:r>
+            <a:pPr algn="l" indent="0" marL="0">
+              <a:lnSpc>
+                <a:spcPts val="1820"/>
+              </a:lnSpc>
+              <a:spcBef>
+                <a:spcPts val="300"/>
+              </a:spcBef>
+              <a:spcAft>
+                <a:spcPts val="300"/>
+              </a:spcAft>
+              <a:buNone/>
+            </a:pPr>
+            <a:r>
+              <a:rPr lang="en-US" sz="1300" dirty="0">
+                <a:solidFill>
+                  <a:srgbClr val="1A1A1A"/>
+                </a:solidFill>
+                <a:latin typeface="Times New Roman" pitchFamily="34" charset="0"/>
+                <a:ea typeface="Times New Roman" pitchFamily="34" charset="-122"/>
+                <a:cs typeface="Times New Roman" pitchFamily="34" charset="-120"/>
+              </a:rPr>
+              <a:t> are an integral part of the Vedas..."</a:t>
+            </a:r>
+            <a:endParaRPr lang="en-US" sz="1300" dirty="0"/>
+          </a:p>
+        </p:txBody>
+      </p:sp>
+      <p:sp>
+        <p:nvSpPr>
+          <p:cNvPr id="8" name="Text 6"/>
+          <p:cNvSpPr/>
+          <p:nvPr/>
+        </p:nvSpPr>
+        <p:spPr>
+          <a:xfrm>
+            <a:off x="406301" y="1967805"/>
+            <a:ext cx="8498026" cy="213271"/>
+          </a:xfrm>
+          <a:prstGeom prst="rect">
+            <a:avLst/>
+          </a:prstGeom>
+          <a:noFill/>
+          <a:ln/>
+        </p:spPr>
+        <p:txBody>
+          <a:bodyPr wrap="square" lIns="0" tIns="0" rIns="0" bIns="0" rtlCol="0" anchor="t"/>
+          <a:lstStyle/>
+          <a:p>
+            <a:pPr algn="l" indent="0" marL="0">
+              <a:lnSpc>
+                <a:spcPts val="1680"/>
+              </a:lnSpc>
+              <a:spcBef>
+                <a:spcPts val="300"/>
+              </a:spcBef>
+              <a:spcAft>
+                <a:spcPts val="300"/>
+              </a:spcAft>
+              <a:buNone/>
+            </a:pPr>
+            <a:r>
+              <a:rPr lang="en-US" sz="1200" i="1" dirty="0">
+                <a:solidFill>
+                  <a:srgbClr val="1A1A1A"/>
+                </a:solidFill>
+                <a:latin typeface="Georgia" pitchFamily="34" charset="0"/>
+                <a:ea typeface="Georgia" pitchFamily="34" charset="-122"/>
+                <a:cs typeface="Georgia" pitchFamily="34" charset="-120"/>
+              </a:rPr>
+              <a:t>(Tirthaji claims these 16 sūtras come from a Vedic appendix-text called the</a:t>
+            </a:r>
+            <a:pPr algn="l" indent="0" marL="0">
+              <a:lnSpc>
+                <a:spcPts val="1680"/>
+              </a:lnSpc>
+              <a:spcBef>
+                <a:spcPts val="300"/>
+              </a:spcBef>
+              <a:spcAft>
+                <a:spcPts val="300"/>
+              </a:spcAft>
+              <a:buNone/>
+            </a:pPr>
+            <a:r>
+              <a:rPr lang="en-US" sz="1200" dirty="0">
+                <a:solidFill>
+                  <a:srgbClr val="1A1A1A"/>
+                </a:solidFill>
+                <a:latin typeface="Georgia" pitchFamily="34" charset="0"/>
+                <a:ea typeface="Georgia" pitchFamily="34" charset="-122"/>
+                <a:cs typeface="Georgia" pitchFamily="34" charset="-120"/>
+              </a:rPr>
+              <a:t> Atharva-veda Pariśiṣṭa</a:t>
+            </a:r>
+            <a:pPr algn="l" indent="0" marL="0">
+              <a:lnSpc>
+                <a:spcPts val="1680"/>
+              </a:lnSpc>
+              <a:spcBef>
+                <a:spcPts val="300"/>
+              </a:spcBef>
+              <a:spcAft>
+                <a:spcPts val="300"/>
+              </a:spcAft>
+              <a:buNone/>
+            </a:pPr>
+            <a:r>
+              <a:rPr lang="en-US" sz="1200" i="1" dirty="0">
+                <a:solidFill>
+                  <a:srgbClr val="1A1A1A"/>
+                </a:solidFill>
+                <a:latin typeface="Georgia" pitchFamily="34" charset="0"/>
+                <a:ea typeface="Georgia" pitchFamily="34" charset="-122"/>
+                <a:cs typeface="Georgia" pitchFamily="34" charset="-120"/>
+              </a:rPr>
+              <a:t>.)</a:t>
+            </a:r>
+            <a:endParaRPr lang="en-US" sz="1200" dirty="0"/>
+          </a:p>
+        </p:txBody>
+      </p:sp>
+      <p:sp>
+        <p:nvSpPr>
+          <p:cNvPr id="9" name="Text 7"/>
           <p:cNvSpPr/>
           <p:nvPr/>
         </p:nvSpPr>
